--- a/public/videos/repositories/vs-jt/vs-jt-tech-preview.pptx
+++ b/public/videos/repositories/vs-jt/vs-jt-tech-preview.pptx
@@ -134,7 +134,7 @@
           <p:cNvPr id="2" name="タイトル 1">
             <a:extLst>
               <a:ext uri="{FF2B5EF4-FFF2-40B4-BE49-F238E27FC236}">
-                <a16:creationId xmlns:a16="http://schemas.microsoft.com/office/drawing/2014/main" id="{55C7DE92-D9C5-936A-A448-5931EFFB4637}"/>
+                <a16:creationId xmlns:a16="http://schemas.microsoft.com/office/drawing/2014/main" id="{7C93DA5A-6A3C-5E73-52AF-B11EA5B951D7}"/>
               </a:ext>
             </a:extLst>
           </p:cNvPr>
@@ -171,7 +171,7 @@
           <p:cNvPr id="3" name="字幕 2">
             <a:extLst>
               <a:ext uri="{FF2B5EF4-FFF2-40B4-BE49-F238E27FC236}">
-                <a16:creationId xmlns:a16="http://schemas.microsoft.com/office/drawing/2014/main" id="{DF88D401-A6F0-37CD-0BAE-081009A8A2AD}"/>
+                <a16:creationId xmlns:a16="http://schemas.microsoft.com/office/drawing/2014/main" id="{ABB59EE4-E25C-0E04-DF28-3844D024ABC8}"/>
               </a:ext>
             </a:extLst>
           </p:cNvPr>
@@ -241,7 +241,7 @@
           <p:cNvPr id="4" name="日付プレースホルダー 3">
             <a:extLst>
               <a:ext uri="{FF2B5EF4-FFF2-40B4-BE49-F238E27FC236}">
-                <a16:creationId xmlns:a16="http://schemas.microsoft.com/office/drawing/2014/main" id="{89F1266E-CBC2-EF58-5145-EDDC5672E3BA}"/>
+                <a16:creationId xmlns:a16="http://schemas.microsoft.com/office/drawing/2014/main" id="{13040DB8-F7E6-1B38-1F49-1BA574639187}"/>
               </a:ext>
             </a:extLst>
           </p:cNvPr>
@@ -257,7 +257,7 @@
           <a:bodyPr/>
           <a:lstStyle/>
           <a:p>
-            <a:fld id="{43E15422-BB48-4258-A2E7-EE85F92D8867}" type="datetimeFigureOut">
+            <a:fld id="{78BBC86E-792B-4DDA-9FCE-CC582720DB85}" type="datetimeFigureOut">
               <a:rPr kumimoji="1" lang="ja-JP" altLang="en-US" smtClean="0"/>
               <a:t>2026/7/30</a:t>
             </a:fld>
@@ -270,7 +270,7 @@
           <p:cNvPr id="5" name="フッター プレースホルダー 4">
             <a:extLst>
               <a:ext uri="{FF2B5EF4-FFF2-40B4-BE49-F238E27FC236}">
-                <a16:creationId xmlns:a16="http://schemas.microsoft.com/office/drawing/2014/main" id="{568B41D1-FA9C-B4DF-7DEC-EB6CD3DF98D9}"/>
+                <a16:creationId xmlns:a16="http://schemas.microsoft.com/office/drawing/2014/main" id="{99DC634C-1F77-F417-BCF0-447CC371FC32}"/>
               </a:ext>
             </a:extLst>
           </p:cNvPr>
@@ -295,7 +295,7 @@
           <p:cNvPr id="6" name="スライド番号プレースホルダー 5">
             <a:extLst>
               <a:ext uri="{FF2B5EF4-FFF2-40B4-BE49-F238E27FC236}">
-                <a16:creationId xmlns:a16="http://schemas.microsoft.com/office/drawing/2014/main" id="{CF70ED1F-7C81-44F5-BDCC-7B041A4AE5AB}"/>
+                <a16:creationId xmlns:a16="http://schemas.microsoft.com/office/drawing/2014/main" id="{900BFAD8-4AE7-5D9A-CE2C-A2689CA52744}"/>
               </a:ext>
             </a:extLst>
           </p:cNvPr>
@@ -311,7 +311,7 @@
           <a:bodyPr/>
           <a:lstStyle/>
           <a:p>
-            <a:fld id="{C0E2FC2B-7929-4BA4-856B-8864C5C91A1A}" type="slidenum">
+            <a:fld id="{4C91C4C9-2D7F-4D5D-9E39-574BF1859B2F}" type="slidenum">
               <a:rPr kumimoji="1" lang="ja-JP" altLang="en-US" smtClean="0"/>
               <a:t>‹#›</a:t>
             </a:fld>
@@ -322,7 +322,7 @@
     </p:spTree>
     <p:extLst>
       <p:ext uri="{BB962C8B-B14F-4D97-AF65-F5344CB8AC3E}">
-        <p14:creationId xmlns:p14="http://schemas.microsoft.com/office/powerpoint/2010/main" val="479740994"/>
+        <p14:creationId xmlns:p14="http://schemas.microsoft.com/office/powerpoint/2010/main" val="3468992151"/>
       </p:ext>
     </p:extLst>
   </p:cSld>
@@ -354,7 +354,7 @@
           <p:cNvPr id="2" name="タイトル 1">
             <a:extLst>
               <a:ext uri="{FF2B5EF4-FFF2-40B4-BE49-F238E27FC236}">
-                <a16:creationId xmlns:a16="http://schemas.microsoft.com/office/drawing/2014/main" id="{0C9C0B75-AD22-E8B6-22C7-3EEA40B1C1B1}"/>
+                <a16:creationId xmlns:a16="http://schemas.microsoft.com/office/drawing/2014/main" id="{FE94FE79-BDD9-8187-6C78-A5502E1DA85F}"/>
               </a:ext>
             </a:extLst>
           </p:cNvPr>
@@ -382,7 +382,7 @@
           <p:cNvPr id="3" name="縦書きテキスト プレースホルダー 2">
             <a:extLst>
               <a:ext uri="{FF2B5EF4-FFF2-40B4-BE49-F238E27FC236}">
-                <a16:creationId xmlns:a16="http://schemas.microsoft.com/office/drawing/2014/main" id="{4E1A86BE-9DFA-DB9C-5E79-1426217DFC44}"/>
+                <a16:creationId xmlns:a16="http://schemas.microsoft.com/office/drawing/2014/main" id="{BECF79C8-E736-0BD9-67B7-C191BA0D4967}"/>
               </a:ext>
             </a:extLst>
           </p:cNvPr>
@@ -471,7 +471,7 @@
           <p:cNvPr id="4" name="日付プレースホルダー 3">
             <a:extLst>
               <a:ext uri="{FF2B5EF4-FFF2-40B4-BE49-F238E27FC236}">
-                <a16:creationId xmlns:a16="http://schemas.microsoft.com/office/drawing/2014/main" id="{BB89AC71-764C-4694-63FE-150CCABE83FC}"/>
+                <a16:creationId xmlns:a16="http://schemas.microsoft.com/office/drawing/2014/main" id="{064CE5F3-8EC8-EEB7-B780-45349B8CD273}"/>
               </a:ext>
             </a:extLst>
           </p:cNvPr>
@@ -487,7 +487,7 @@
           <a:bodyPr/>
           <a:lstStyle/>
           <a:p>
-            <a:fld id="{43E15422-BB48-4258-A2E7-EE85F92D8867}" type="datetimeFigureOut">
+            <a:fld id="{78BBC86E-792B-4DDA-9FCE-CC582720DB85}" type="datetimeFigureOut">
               <a:rPr kumimoji="1" lang="ja-JP" altLang="en-US" smtClean="0"/>
               <a:t>2026/7/30</a:t>
             </a:fld>
@@ -500,7 +500,7 @@
           <p:cNvPr id="5" name="フッター プレースホルダー 4">
             <a:extLst>
               <a:ext uri="{FF2B5EF4-FFF2-40B4-BE49-F238E27FC236}">
-                <a16:creationId xmlns:a16="http://schemas.microsoft.com/office/drawing/2014/main" id="{365DDA34-C229-F2FD-BC9A-AA9D881B8A89}"/>
+                <a16:creationId xmlns:a16="http://schemas.microsoft.com/office/drawing/2014/main" id="{40AEC096-2E12-B77C-6150-B860CC7458BB}"/>
               </a:ext>
             </a:extLst>
           </p:cNvPr>
@@ -525,7 +525,7 @@
           <p:cNvPr id="6" name="スライド番号プレースホルダー 5">
             <a:extLst>
               <a:ext uri="{FF2B5EF4-FFF2-40B4-BE49-F238E27FC236}">
-                <a16:creationId xmlns:a16="http://schemas.microsoft.com/office/drawing/2014/main" id="{6BD6B390-4E8B-433B-10A8-E33F5048DE66}"/>
+                <a16:creationId xmlns:a16="http://schemas.microsoft.com/office/drawing/2014/main" id="{EAA5A42B-1362-D492-6FD3-7CC2E843A91E}"/>
               </a:ext>
             </a:extLst>
           </p:cNvPr>
@@ -541,7 +541,7 @@
           <a:bodyPr/>
           <a:lstStyle/>
           <a:p>
-            <a:fld id="{C0E2FC2B-7929-4BA4-856B-8864C5C91A1A}" type="slidenum">
+            <a:fld id="{4C91C4C9-2D7F-4D5D-9E39-574BF1859B2F}" type="slidenum">
               <a:rPr kumimoji="1" lang="ja-JP" altLang="en-US" smtClean="0"/>
               <a:t>‹#›</a:t>
             </a:fld>
@@ -552,7 +552,7 @@
     </p:spTree>
     <p:extLst>
       <p:ext uri="{BB962C8B-B14F-4D97-AF65-F5344CB8AC3E}">
-        <p14:creationId xmlns:p14="http://schemas.microsoft.com/office/powerpoint/2010/main" val="2790363986"/>
+        <p14:creationId xmlns:p14="http://schemas.microsoft.com/office/powerpoint/2010/main" val="2340041083"/>
       </p:ext>
     </p:extLst>
   </p:cSld>
@@ -584,7 +584,7 @@
           <p:cNvPr id="2" name="縦書きタイトル 1">
             <a:extLst>
               <a:ext uri="{FF2B5EF4-FFF2-40B4-BE49-F238E27FC236}">
-                <a16:creationId xmlns:a16="http://schemas.microsoft.com/office/drawing/2014/main" id="{2E7B1BFB-133C-0D0A-6823-3820DF2CB274}"/>
+                <a16:creationId xmlns:a16="http://schemas.microsoft.com/office/drawing/2014/main" id="{506C2A66-9A6F-6E5A-ED09-7E7446BD64E6}"/>
               </a:ext>
             </a:extLst>
           </p:cNvPr>
@@ -617,7 +617,7 @@
           <p:cNvPr id="3" name="縦書きテキスト プレースホルダー 2">
             <a:extLst>
               <a:ext uri="{FF2B5EF4-FFF2-40B4-BE49-F238E27FC236}">
-                <a16:creationId xmlns:a16="http://schemas.microsoft.com/office/drawing/2014/main" id="{17533E84-D2D9-28B8-CB7F-0EE216A5E426}"/>
+                <a16:creationId xmlns:a16="http://schemas.microsoft.com/office/drawing/2014/main" id="{168BEE9A-1893-AB73-1314-9D9A13A09317}"/>
               </a:ext>
             </a:extLst>
           </p:cNvPr>
@@ -711,7 +711,7 @@
           <p:cNvPr id="4" name="日付プレースホルダー 3">
             <a:extLst>
               <a:ext uri="{FF2B5EF4-FFF2-40B4-BE49-F238E27FC236}">
-                <a16:creationId xmlns:a16="http://schemas.microsoft.com/office/drawing/2014/main" id="{893A0A1D-B824-10BF-D405-6911AE30690D}"/>
+                <a16:creationId xmlns:a16="http://schemas.microsoft.com/office/drawing/2014/main" id="{76BA2D3A-9C0C-0A9F-1A71-7CDE72986923}"/>
               </a:ext>
             </a:extLst>
           </p:cNvPr>
@@ -727,7 +727,7 @@
           <a:bodyPr/>
           <a:lstStyle/>
           <a:p>
-            <a:fld id="{43E15422-BB48-4258-A2E7-EE85F92D8867}" type="datetimeFigureOut">
+            <a:fld id="{78BBC86E-792B-4DDA-9FCE-CC582720DB85}" type="datetimeFigureOut">
               <a:rPr kumimoji="1" lang="ja-JP" altLang="en-US" smtClean="0"/>
               <a:t>2026/7/30</a:t>
             </a:fld>
@@ -740,7 +740,7 @@
           <p:cNvPr id="5" name="フッター プレースホルダー 4">
             <a:extLst>
               <a:ext uri="{FF2B5EF4-FFF2-40B4-BE49-F238E27FC236}">
-                <a16:creationId xmlns:a16="http://schemas.microsoft.com/office/drawing/2014/main" id="{6F23F702-6052-3E93-69DF-2CDEA1064BE4}"/>
+                <a16:creationId xmlns:a16="http://schemas.microsoft.com/office/drawing/2014/main" id="{F8336A86-1C34-7D81-140E-41072006E17A}"/>
               </a:ext>
             </a:extLst>
           </p:cNvPr>
@@ -765,7 +765,7 @@
           <p:cNvPr id="6" name="スライド番号プレースホルダー 5">
             <a:extLst>
               <a:ext uri="{FF2B5EF4-FFF2-40B4-BE49-F238E27FC236}">
-                <a16:creationId xmlns:a16="http://schemas.microsoft.com/office/drawing/2014/main" id="{1E8E098A-A944-010E-CA2F-3DF4DB013ECE}"/>
+                <a16:creationId xmlns:a16="http://schemas.microsoft.com/office/drawing/2014/main" id="{CE25CE08-9E7E-C0E5-C156-13160862709E}"/>
               </a:ext>
             </a:extLst>
           </p:cNvPr>
@@ -781,7 +781,7 @@
           <a:bodyPr/>
           <a:lstStyle/>
           <a:p>
-            <a:fld id="{C0E2FC2B-7929-4BA4-856B-8864C5C91A1A}" type="slidenum">
+            <a:fld id="{4C91C4C9-2D7F-4D5D-9E39-574BF1859B2F}" type="slidenum">
               <a:rPr kumimoji="1" lang="ja-JP" altLang="en-US" smtClean="0"/>
               <a:t>‹#›</a:t>
             </a:fld>
@@ -792,7 +792,7 @@
     </p:spTree>
     <p:extLst>
       <p:ext uri="{BB962C8B-B14F-4D97-AF65-F5344CB8AC3E}">
-        <p14:creationId xmlns:p14="http://schemas.microsoft.com/office/powerpoint/2010/main" val="3430189547"/>
+        <p14:creationId xmlns:p14="http://schemas.microsoft.com/office/powerpoint/2010/main" val="3217670590"/>
       </p:ext>
     </p:extLst>
   </p:cSld>
@@ -824,7 +824,7 @@
           <p:cNvPr id="2" name="タイトル 1">
             <a:extLst>
               <a:ext uri="{FF2B5EF4-FFF2-40B4-BE49-F238E27FC236}">
-                <a16:creationId xmlns:a16="http://schemas.microsoft.com/office/drawing/2014/main" id="{76547CEF-15F6-6844-C9D3-F3D43C8250C4}"/>
+                <a16:creationId xmlns:a16="http://schemas.microsoft.com/office/drawing/2014/main" id="{0A568CBE-FE56-66A6-CFF1-8E736BAE11CC}"/>
               </a:ext>
             </a:extLst>
           </p:cNvPr>
@@ -852,7 +852,7 @@
           <p:cNvPr id="3" name="コンテンツ プレースホルダー 2">
             <a:extLst>
               <a:ext uri="{FF2B5EF4-FFF2-40B4-BE49-F238E27FC236}">
-                <a16:creationId xmlns:a16="http://schemas.microsoft.com/office/drawing/2014/main" id="{EA059BB7-53C6-E2B8-4701-EBC7EEA2C8D6}"/>
+                <a16:creationId xmlns:a16="http://schemas.microsoft.com/office/drawing/2014/main" id="{F3865352-7B57-CD14-D556-8EEB326376BA}"/>
               </a:ext>
             </a:extLst>
           </p:cNvPr>
@@ -941,7 +941,7 @@
           <p:cNvPr id="4" name="日付プレースホルダー 3">
             <a:extLst>
               <a:ext uri="{FF2B5EF4-FFF2-40B4-BE49-F238E27FC236}">
-                <a16:creationId xmlns:a16="http://schemas.microsoft.com/office/drawing/2014/main" id="{1C6882EE-5AD9-45A3-DD81-A4F0F8A3EB85}"/>
+                <a16:creationId xmlns:a16="http://schemas.microsoft.com/office/drawing/2014/main" id="{82DDE1EA-6866-9914-FDFF-32CE0AA1CA59}"/>
               </a:ext>
             </a:extLst>
           </p:cNvPr>
@@ -957,7 +957,7 @@
           <a:bodyPr/>
           <a:lstStyle/>
           <a:p>
-            <a:fld id="{43E15422-BB48-4258-A2E7-EE85F92D8867}" type="datetimeFigureOut">
+            <a:fld id="{78BBC86E-792B-4DDA-9FCE-CC582720DB85}" type="datetimeFigureOut">
               <a:rPr kumimoji="1" lang="ja-JP" altLang="en-US" smtClean="0"/>
               <a:t>2026/7/30</a:t>
             </a:fld>
@@ -970,7 +970,7 @@
           <p:cNvPr id="5" name="フッター プレースホルダー 4">
             <a:extLst>
               <a:ext uri="{FF2B5EF4-FFF2-40B4-BE49-F238E27FC236}">
-                <a16:creationId xmlns:a16="http://schemas.microsoft.com/office/drawing/2014/main" id="{21881C8E-B63A-3F1A-BB27-4FA24985AAF2}"/>
+                <a16:creationId xmlns:a16="http://schemas.microsoft.com/office/drawing/2014/main" id="{AD80AC3B-B6BF-6C9F-7F1B-9CADF0E1443A}"/>
               </a:ext>
             </a:extLst>
           </p:cNvPr>
@@ -995,7 +995,7 @@
           <p:cNvPr id="6" name="スライド番号プレースホルダー 5">
             <a:extLst>
               <a:ext uri="{FF2B5EF4-FFF2-40B4-BE49-F238E27FC236}">
-                <a16:creationId xmlns:a16="http://schemas.microsoft.com/office/drawing/2014/main" id="{EEE44316-5A09-4A1E-5258-DBBF0C4CF364}"/>
+                <a16:creationId xmlns:a16="http://schemas.microsoft.com/office/drawing/2014/main" id="{ECA576FE-FBD2-DD3C-6B84-348024ECF9BE}"/>
               </a:ext>
             </a:extLst>
           </p:cNvPr>
@@ -1011,7 +1011,7 @@
           <a:bodyPr/>
           <a:lstStyle/>
           <a:p>
-            <a:fld id="{C0E2FC2B-7929-4BA4-856B-8864C5C91A1A}" type="slidenum">
+            <a:fld id="{4C91C4C9-2D7F-4D5D-9E39-574BF1859B2F}" type="slidenum">
               <a:rPr kumimoji="1" lang="ja-JP" altLang="en-US" smtClean="0"/>
               <a:t>‹#›</a:t>
             </a:fld>
@@ -1022,7 +1022,7 @@
     </p:spTree>
     <p:extLst>
       <p:ext uri="{BB962C8B-B14F-4D97-AF65-F5344CB8AC3E}">
-        <p14:creationId xmlns:p14="http://schemas.microsoft.com/office/powerpoint/2010/main" val="2284262584"/>
+        <p14:creationId xmlns:p14="http://schemas.microsoft.com/office/powerpoint/2010/main" val="1819806035"/>
       </p:ext>
     </p:extLst>
   </p:cSld>
@@ -1054,7 +1054,7 @@
           <p:cNvPr id="2" name="タイトル 1">
             <a:extLst>
               <a:ext uri="{FF2B5EF4-FFF2-40B4-BE49-F238E27FC236}">
-                <a16:creationId xmlns:a16="http://schemas.microsoft.com/office/drawing/2014/main" id="{EA7A3E4B-57F9-0547-47C8-82E53A81C157}"/>
+                <a16:creationId xmlns:a16="http://schemas.microsoft.com/office/drawing/2014/main" id="{E3C0C8F2-9CE3-114C-891A-4DC3DDCCFA2B}"/>
               </a:ext>
             </a:extLst>
           </p:cNvPr>
@@ -1091,7 +1091,7 @@
           <p:cNvPr id="3" name="テキスト プレースホルダー 2">
             <a:extLst>
               <a:ext uri="{FF2B5EF4-FFF2-40B4-BE49-F238E27FC236}">
-                <a16:creationId xmlns:a16="http://schemas.microsoft.com/office/drawing/2014/main" id="{2CD159D3-78BF-7211-DEF9-A239A2BBC77A}"/>
+                <a16:creationId xmlns:a16="http://schemas.microsoft.com/office/drawing/2014/main" id="{2A722892-E837-8EF5-9C56-FC4059EA49FA}"/>
               </a:ext>
             </a:extLst>
           </p:cNvPr>
@@ -1216,7 +1216,7 @@
           <p:cNvPr id="4" name="日付プレースホルダー 3">
             <a:extLst>
               <a:ext uri="{FF2B5EF4-FFF2-40B4-BE49-F238E27FC236}">
-                <a16:creationId xmlns:a16="http://schemas.microsoft.com/office/drawing/2014/main" id="{00AC0315-8DDE-C4AE-4CF0-256CB4AC23F0}"/>
+                <a16:creationId xmlns:a16="http://schemas.microsoft.com/office/drawing/2014/main" id="{B7ACB3F2-6349-50DC-8FB4-27914DE04B47}"/>
               </a:ext>
             </a:extLst>
           </p:cNvPr>
@@ -1232,7 +1232,7 @@
           <a:bodyPr/>
           <a:lstStyle/>
           <a:p>
-            <a:fld id="{43E15422-BB48-4258-A2E7-EE85F92D8867}" type="datetimeFigureOut">
+            <a:fld id="{78BBC86E-792B-4DDA-9FCE-CC582720DB85}" type="datetimeFigureOut">
               <a:rPr kumimoji="1" lang="ja-JP" altLang="en-US" smtClean="0"/>
               <a:t>2026/7/30</a:t>
             </a:fld>
@@ -1245,7 +1245,7 @@
           <p:cNvPr id="5" name="フッター プレースホルダー 4">
             <a:extLst>
               <a:ext uri="{FF2B5EF4-FFF2-40B4-BE49-F238E27FC236}">
-                <a16:creationId xmlns:a16="http://schemas.microsoft.com/office/drawing/2014/main" id="{5C7716D5-5776-76F5-3173-B46015042DEA}"/>
+                <a16:creationId xmlns:a16="http://schemas.microsoft.com/office/drawing/2014/main" id="{B3590232-667F-5215-0403-4F37AC963D8F}"/>
               </a:ext>
             </a:extLst>
           </p:cNvPr>
@@ -1270,7 +1270,7 @@
           <p:cNvPr id="6" name="スライド番号プレースホルダー 5">
             <a:extLst>
               <a:ext uri="{FF2B5EF4-FFF2-40B4-BE49-F238E27FC236}">
-                <a16:creationId xmlns:a16="http://schemas.microsoft.com/office/drawing/2014/main" id="{7457D360-3C8F-AA28-5DC4-DFCFF2428C9B}"/>
+                <a16:creationId xmlns:a16="http://schemas.microsoft.com/office/drawing/2014/main" id="{643E8C5C-33B2-B91C-A131-1E6B4312831C}"/>
               </a:ext>
             </a:extLst>
           </p:cNvPr>
@@ -1286,7 +1286,7 @@
           <a:bodyPr/>
           <a:lstStyle/>
           <a:p>
-            <a:fld id="{C0E2FC2B-7929-4BA4-856B-8864C5C91A1A}" type="slidenum">
+            <a:fld id="{4C91C4C9-2D7F-4D5D-9E39-574BF1859B2F}" type="slidenum">
               <a:rPr kumimoji="1" lang="ja-JP" altLang="en-US" smtClean="0"/>
               <a:t>‹#›</a:t>
             </a:fld>
@@ -1297,7 +1297,7 @@
     </p:spTree>
     <p:extLst>
       <p:ext uri="{BB962C8B-B14F-4D97-AF65-F5344CB8AC3E}">
-        <p14:creationId xmlns:p14="http://schemas.microsoft.com/office/powerpoint/2010/main" val="1701462134"/>
+        <p14:creationId xmlns:p14="http://schemas.microsoft.com/office/powerpoint/2010/main" val="3861723536"/>
       </p:ext>
     </p:extLst>
   </p:cSld>
@@ -1329,7 +1329,7 @@
           <p:cNvPr id="2" name="タイトル 1">
             <a:extLst>
               <a:ext uri="{FF2B5EF4-FFF2-40B4-BE49-F238E27FC236}">
-                <a16:creationId xmlns:a16="http://schemas.microsoft.com/office/drawing/2014/main" id="{29EB2EFE-569F-AF2A-8888-AF7567B0988D}"/>
+                <a16:creationId xmlns:a16="http://schemas.microsoft.com/office/drawing/2014/main" id="{648612D3-1D18-4356-5118-336215AEE8AB}"/>
               </a:ext>
             </a:extLst>
           </p:cNvPr>
@@ -1357,7 +1357,7 @@
           <p:cNvPr id="3" name="コンテンツ プレースホルダー 2">
             <a:extLst>
               <a:ext uri="{FF2B5EF4-FFF2-40B4-BE49-F238E27FC236}">
-                <a16:creationId xmlns:a16="http://schemas.microsoft.com/office/drawing/2014/main" id="{EC2EAA23-14BA-43C6-F661-0F71F61BEFB8}"/>
+                <a16:creationId xmlns:a16="http://schemas.microsoft.com/office/drawing/2014/main" id="{BC15DF0E-5E9F-E3C8-94D4-F95DE1633C61}"/>
               </a:ext>
             </a:extLst>
           </p:cNvPr>
@@ -1451,7 +1451,7 @@
           <p:cNvPr id="4" name="コンテンツ プレースホルダー 3">
             <a:extLst>
               <a:ext uri="{FF2B5EF4-FFF2-40B4-BE49-F238E27FC236}">
-                <a16:creationId xmlns:a16="http://schemas.microsoft.com/office/drawing/2014/main" id="{54ADA79B-81E0-62A7-72B1-F5183867C511}"/>
+                <a16:creationId xmlns:a16="http://schemas.microsoft.com/office/drawing/2014/main" id="{457730FE-8106-F2A8-54AD-75CB07A3A73B}"/>
               </a:ext>
             </a:extLst>
           </p:cNvPr>
@@ -1545,7 +1545,7 @@
           <p:cNvPr id="5" name="日付プレースホルダー 4">
             <a:extLst>
               <a:ext uri="{FF2B5EF4-FFF2-40B4-BE49-F238E27FC236}">
-                <a16:creationId xmlns:a16="http://schemas.microsoft.com/office/drawing/2014/main" id="{357C2140-975A-1BC3-4C3C-1F055BFC7F17}"/>
+                <a16:creationId xmlns:a16="http://schemas.microsoft.com/office/drawing/2014/main" id="{0040F4CC-F1C6-7E3B-3BB3-A93769A4F3ED}"/>
               </a:ext>
             </a:extLst>
           </p:cNvPr>
@@ -1561,7 +1561,7 @@
           <a:bodyPr/>
           <a:lstStyle/>
           <a:p>
-            <a:fld id="{43E15422-BB48-4258-A2E7-EE85F92D8867}" type="datetimeFigureOut">
+            <a:fld id="{78BBC86E-792B-4DDA-9FCE-CC582720DB85}" type="datetimeFigureOut">
               <a:rPr kumimoji="1" lang="ja-JP" altLang="en-US" smtClean="0"/>
               <a:t>2026/7/30</a:t>
             </a:fld>
@@ -1574,7 +1574,7 @@
           <p:cNvPr id="6" name="フッター プレースホルダー 5">
             <a:extLst>
               <a:ext uri="{FF2B5EF4-FFF2-40B4-BE49-F238E27FC236}">
-                <a16:creationId xmlns:a16="http://schemas.microsoft.com/office/drawing/2014/main" id="{2912182C-72EB-3CDB-A3A1-564872C7D4FA}"/>
+                <a16:creationId xmlns:a16="http://schemas.microsoft.com/office/drawing/2014/main" id="{DE54F1B3-5F27-B854-7D51-B30474743E06}"/>
               </a:ext>
             </a:extLst>
           </p:cNvPr>
@@ -1599,7 +1599,7 @@
           <p:cNvPr id="7" name="スライド番号プレースホルダー 6">
             <a:extLst>
               <a:ext uri="{FF2B5EF4-FFF2-40B4-BE49-F238E27FC236}">
-                <a16:creationId xmlns:a16="http://schemas.microsoft.com/office/drawing/2014/main" id="{19C68875-B51C-5564-9D42-92ECA97796D2}"/>
+                <a16:creationId xmlns:a16="http://schemas.microsoft.com/office/drawing/2014/main" id="{33075098-F15E-43BE-B600-BBBFF864BCDB}"/>
               </a:ext>
             </a:extLst>
           </p:cNvPr>
@@ -1615,7 +1615,7 @@
           <a:bodyPr/>
           <a:lstStyle/>
           <a:p>
-            <a:fld id="{C0E2FC2B-7929-4BA4-856B-8864C5C91A1A}" type="slidenum">
+            <a:fld id="{4C91C4C9-2D7F-4D5D-9E39-574BF1859B2F}" type="slidenum">
               <a:rPr kumimoji="1" lang="ja-JP" altLang="en-US" smtClean="0"/>
               <a:t>‹#›</a:t>
             </a:fld>
@@ -1626,7 +1626,7 @@
     </p:spTree>
     <p:extLst>
       <p:ext uri="{BB962C8B-B14F-4D97-AF65-F5344CB8AC3E}">
-        <p14:creationId xmlns:p14="http://schemas.microsoft.com/office/powerpoint/2010/main" val="2390245899"/>
+        <p14:creationId xmlns:p14="http://schemas.microsoft.com/office/powerpoint/2010/main" val="2550394025"/>
       </p:ext>
     </p:extLst>
   </p:cSld>
@@ -1658,7 +1658,7 @@
           <p:cNvPr id="2" name="タイトル 1">
             <a:extLst>
               <a:ext uri="{FF2B5EF4-FFF2-40B4-BE49-F238E27FC236}">
-                <a16:creationId xmlns:a16="http://schemas.microsoft.com/office/drawing/2014/main" id="{ACC69991-108C-C115-BA0D-02B4D0AEC30B}"/>
+                <a16:creationId xmlns:a16="http://schemas.microsoft.com/office/drawing/2014/main" id="{3B6BF9AF-7FCA-6003-156E-3BB9EAF9D37B}"/>
               </a:ext>
             </a:extLst>
           </p:cNvPr>
@@ -1691,7 +1691,7 @@
           <p:cNvPr id="3" name="テキスト プレースホルダー 2">
             <a:extLst>
               <a:ext uri="{FF2B5EF4-FFF2-40B4-BE49-F238E27FC236}">
-                <a16:creationId xmlns:a16="http://schemas.microsoft.com/office/drawing/2014/main" id="{A41A0EA6-DF46-D2DB-0159-CD578E5A1429}"/>
+                <a16:creationId xmlns:a16="http://schemas.microsoft.com/office/drawing/2014/main" id="{703617DA-2818-7405-4BF8-B8759CA74B54}"/>
               </a:ext>
             </a:extLst>
           </p:cNvPr>
@@ -1762,7 +1762,7 @@
           <p:cNvPr id="4" name="コンテンツ プレースホルダー 3">
             <a:extLst>
               <a:ext uri="{FF2B5EF4-FFF2-40B4-BE49-F238E27FC236}">
-                <a16:creationId xmlns:a16="http://schemas.microsoft.com/office/drawing/2014/main" id="{5E75825F-2132-1EE7-C207-04CC9F16733C}"/>
+                <a16:creationId xmlns:a16="http://schemas.microsoft.com/office/drawing/2014/main" id="{3359E738-1A2C-06AA-E2F4-5A07FD09AD43}"/>
               </a:ext>
             </a:extLst>
           </p:cNvPr>
@@ -1856,7 +1856,7 @@
           <p:cNvPr id="5" name="テキスト プレースホルダー 4">
             <a:extLst>
               <a:ext uri="{FF2B5EF4-FFF2-40B4-BE49-F238E27FC236}">
-                <a16:creationId xmlns:a16="http://schemas.microsoft.com/office/drawing/2014/main" id="{362C92E4-7F9A-CED4-5596-835C83A826A9}"/>
+                <a16:creationId xmlns:a16="http://schemas.microsoft.com/office/drawing/2014/main" id="{628F7629-5BB3-052B-3C67-54D05D1F224D}"/>
               </a:ext>
             </a:extLst>
           </p:cNvPr>
@@ -1927,7 +1927,7 @@
           <p:cNvPr id="6" name="コンテンツ プレースホルダー 5">
             <a:extLst>
               <a:ext uri="{FF2B5EF4-FFF2-40B4-BE49-F238E27FC236}">
-                <a16:creationId xmlns:a16="http://schemas.microsoft.com/office/drawing/2014/main" id="{E8B0C4BF-3C93-72E2-DE78-694612C58B00}"/>
+                <a16:creationId xmlns:a16="http://schemas.microsoft.com/office/drawing/2014/main" id="{33536135-930C-21E6-DC79-6C03251D0233}"/>
               </a:ext>
             </a:extLst>
           </p:cNvPr>
@@ -2021,7 +2021,7 @@
           <p:cNvPr id="7" name="日付プレースホルダー 6">
             <a:extLst>
               <a:ext uri="{FF2B5EF4-FFF2-40B4-BE49-F238E27FC236}">
-                <a16:creationId xmlns:a16="http://schemas.microsoft.com/office/drawing/2014/main" id="{9208F108-CFC2-CAE0-6165-B5284B3E784A}"/>
+                <a16:creationId xmlns:a16="http://schemas.microsoft.com/office/drawing/2014/main" id="{7BA44AA7-1ABE-DACB-C324-CA659144B75B}"/>
               </a:ext>
             </a:extLst>
           </p:cNvPr>
@@ -2037,7 +2037,7 @@
           <a:bodyPr/>
           <a:lstStyle/>
           <a:p>
-            <a:fld id="{43E15422-BB48-4258-A2E7-EE85F92D8867}" type="datetimeFigureOut">
+            <a:fld id="{78BBC86E-792B-4DDA-9FCE-CC582720DB85}" type="datetimeFigureOut">
               <a:rPr kumimoji="1" lang="ja-JP" altLang="en-US" smtClean="0"/>
               <a:t>2026/7/30</a:t>
             </a:fld>
@@ -2050,7 +2050,7 @@
           <p:cNvPr id="8" name="フッター プレースホルダー 7">
             <a:extLst>
               <a:ext uri="{FF2B5EF4-FFF2-40B4-BE49-F238E27FC236}">
-                <a16:creationId xmlns:a16="http://schemas.microsoft.com/office/drawing/2014/main" id="{23F9B9F7-0A4A-1043-CE5B-599ABA7D4DE0}"/>
+                <a16:creationId xmlns:a16="http://schemas.microsoft.com/office/drawing/2014/main" id="{087CB2C9-DD83-9AFF-E98F-71C2CE62E58F}"/>
               </a:ext>
             </a:extLst>
           </p:cNvPr>
@@ -2075,7 +2075,7 @@
           <p:cNvPr id="9" name="スライド番号プレースホルダー 8">
             <a:extLst>
               <a:ext uri="{FF2B5EF4-FFF2-40B4-BE49-F238E27FC236}">
-                <a16:creationId xmlns:a16="http://schemas.microsoft.com/office/drawing/2014/main" id="{2FF03FFC-3717-F2FE-BEA7-8CA5FCD3699D}"/>
+                <a16:creationId xmlns:a16="http://schemas.microsoft.com/office/drawing/2014/main" id="{683FC0F1-A4F1-A670-1A71-21F220F8DC3D}"/>
               </a:ext>
             </a:extLst>
           </p:cNvPr>
@@ -2091,7 +2091,7 @@
           <a:bodyPr/>
           <a:lstStyle/>
           <a:p>
-            <a:fld id="{C0E2FC2B-7929-4BA4-856B-8864C5C91A1A}" type="slidenum">
+            <a:fld id="{4C91C4C9-2D7F-4D5D-9E39-574BF1859B2F}" type="slidenum">
               <a:rPr kumimoji="1" lang="ja-JP" altLang="en-US" smtClean="0"/>
               <a:t>‹#›</a:t>
             </a:fld>
@@ -2102,7 +2102,7 @@
     </p:spTree>
     <p:extLst>
       <p:ext uri="{BB962C8B-B14F-4D97-AF65-F5344CB8AC3E}">
-        <p14:creationId xmlns:p14="http://schemas.microsoft.com/office/powerpoint/2010/main" val="127332586"/>
+        <p14:creationId xmlns:p14="http://schemas.microsoft.com/office/powerpoint/2010/main" val="2943295853"/>
       </p:ext>
     </p:extLst>
   </p:cSld>
@@ -2134,7 +2134,7 @@
           <p:cNvPr id="2" name="タイトル 1">
             <a:extLst>
               <a:ext uri="{FF2B5EF4-FFF2-40B4-BE49-F238E27FC236}">
-                <a16:creationId xmlns:a16="http://schemas.microsoft.com/office/drawing/2014/main" id="{2E64DAD7-894A-1BA9-104F-156841682D98}"/>
+                <a16:creationId xmlns:a16="http://schemas.microsoft.com/office/drawing/2014/main" id="{B1CF3B26-9509-5CBC-502C-4AEB2EA6EEBF}"/>
               </a:ext>
             </a:extLst>
           </p:cNvPr>
@@ -2162,7 +2162,7 @@
           <p:cNvPr id="3" name="日付プレースホルダー 2">
             <a:extLst>
               <a:ext uri="{FF2B5EF4-FFF2-40B4-BE49-F238E27FC236}">
-                <a16:creationId xmlns:a16="http://schemas.microsoft.com/office/drawing/2014/main" id="{3C3D3806-2E0B-8A8F-51BE-25BDD39F94BC}"/>
+                <a16:creationId xmlns:a16="http://schemas.microsoft.com/office/drawing/2014/main" id="{1229B736-C0B3-3D8A-455C-6BF73B33FFEA}"/>
               </a:ext>
             </a:extLst>
           </p:cNvPr>
@@ -2178,7 +2178,7 @@
           <a:bodyPr/>
           <a:lstStyle/>
           <a:p>
-            <a:fld id="{43E15422-BB48-4258-A2E7-EE85F92D8867}" type="datetimeFigureOut">
+            <a:fld id="{78BBC86E-792B-4DDA-9FCE-CC582720DB85}" type="datetimeFigureOut">
               <a:rPr kumimoji="1" lang="ja-JP" altLang="en-US" smtClean="0"/>
               <a:t>2026/7/30</a:t>
             </a:fld>
@@ -2191,7 +2191,7 @@
           <p:cNvPr id="4" name="フッター プレースホルダー 3">
             <a:extLst>
               <a:ext uri="{FF2B5EF4-FFF2-40B4-BE49-F238E27FC236}">
-                <a16:creationId xmlns:a16="http://schemas.microsoft.com/office/drawing/2014/main" id="{E9A6E7BC-0FB2-747E-E237-6E641563415E}"/>
+                <a16:creationId xmlns:a16="http://schemas.microsoft.com/office/drawing/2014/main" id="{676EDF61-FA3D-34F7-C922-676F381E8034}"/>
               </a:ext>
             </a:extLst>
           </p:cNvPr>
@@ -2216,7 +2216,7 @@
           <p:cNvPr id="5" name="スライド番号プレースホルダー 4">
             <a:extLst>
               <a:ext uri="{FF2B5EF4-FFF2-40B4-BE49-F238E27FC236}">
-                <a16:creationId xmlns:a16="http://schemas.microsoft.com/office/drawing/2014/main" id="{A600D96B-0CEC-6649-90B1-20639AE8ECAF}"/>
+                <a16:creationId xmlns:a16="http://schemas.microsoft.com/office/drawing/2014/main" id="{E252A059-25EB-2D59-FABE-7275CB7F8FF1}"/>
               </a:ext>
             </a:extLst>
           </p:cNvPr>
@@ -2232,7 +2232,7 @@
           <a:bodyPr/>
           <a:lstStyle/>
           <a:p>
-            <a:fld id="{C0E2FC2B-7929-4BA4-856B-8864C5C91A1A}" type="slidenum">
+            <a:fld id="{4C91C4C9-2D7F-4D5D-9E39-574BF1859B2F}" type="slidenum">
               <a:rPr kumimoji="1" lang="ja-JP" altLang="en-US" smtClean="0"/>
               <a:t>‹#›</a:t>
             </a:fld>
@@ -2243,7 +2243,7 @@
     </p:spTree>
     <p:extLst>
       <p:ext uri="{BB962C8B-B14F-4D97-AF65-F5344CB8AC3E}">
-        <p14:creationId xmlns:p14="http://schemas.microsoft.com/office/powerpoint/2010/main" val="568753471"/>
+        <p14:creationId xmlns:p14="http://schemas.microsoft.com/office/powerpoint/2010/main" val="1158678709"/>
       </p:ext>
     </p:extLst>
   </p:cSld>
@@ -2275,7 +2275,7 @@
           <p:cNvPr id="2" name="日付プレースホルダー 1">
             <a:extLst>
               <a:ext uri="{FF2B5EF4-FFF2-40B4-BE49-F238E27FC236}">
-                <a16:creationId xmlns:a16="http://schemas.microsoft.com/office/drawing/2014/main" id="{4108DF24-C7A9-F30A-07D7-A7E042DD738C}"/>
+                <a16:creationId xmlns:a16="http://schemas.microsoft.com/office/drawing/2014/main" id="{44CAFBAC-8F21-3D73-5717-564FD2635B8C}"/>
               </a:ext>
             </a:extLst>
           </p:cNvPr>
@@ -2291,7 +2291,7 @@
           <a:bodyPr/>
           <a:lstStyle/>
           <a:p>
-            <a:fld id="{43E15422-BB48-4258-A2E7-EE85F92D8867}" type="datetimeFigureOut">
+            <a:fld id="{78BBC86E-792B-4DDA-9FCE-CC582720DB85}" type="datetimeFigureOut">
               <a:rPr kumimoji="1" lang="ja-JP" altLang="en-US" smtClean="0"/>
               <a:t>2026/7/30</a:t>
             </a:fld>
@@ -2304,7 +2304,7 @@
           <p:cNvPr id="3" name="フッター プレースホルダー 2">
             <a:extLst>
               <a:ext uri="{FF2B5EF4-FFF2-40B4-BE49-F238E27FC236}">
-                <a16:creationId xmlns:a16="http://schemas.microsoft.com/office/drawing/2014/main" id="{E8EE24C7-A46B-91ED-E064-9DC0D70D837E}"/>
+                <a16:creationId xmlns:a16="http://schemas.microsoft.com/office/drawing/2014/main" id="{B7BDAB11-26C1-2061-B04E-EA2DF1CE8F0B}"/>
               </a:ext>
             </a:extLst>
           </p:cNvPr>
@@ -2329,7 +2329,7 @@
           <p:cNvPr id="4" name="スライド番号プレースホルダー 3">
             <a:extLst>
               <a:ext uri="{FF2B5EF4-FFF2-40B4-BE49-F238E27FC236}">
-                <a16:creationId xmlns:a16="http://schemas.microsoft.com/office/drawing/2014/main" id="{6701774D-5276-92DF-F6EF-24FD3633DA23}"/>
+                <a16:creationId xmlns:a16="http://schemas.microsoft.com/office/drawing/2014/main" id="{E76BFA24-487E-D125-8516-F81DCB97E43B}"/>
               </a:ext>
             </a:extLst>
           </p:cNvPr>
@@ -2345,7 +2345,7 @@
           <a:bodyPr/>
           <a:lstStyle/>
           <a:p>
-            <a:fld id="{C0E2FC2B-7929-4BA4-856B-8864C5C91A1A}" type="slidenum">
+            <a:fld id="{4C91C4C9-2D7F-4D5D-9E39-574BF1859B2F}" type="slidenum">
               <a:rPr kumimoji="1" lang="ja-JP" altLang="en-US" smtClean="0"/>
               <a:t>‹#›</a:t>
             </a:fld>
@@ -2356,7 +2356,7 @@
     </p:spTree>
     <p:extLst>
       <p:ext uri="{BB962C8B-B14F-4D97-AF65-F5344CB8AC3E}">
-        <p14:creationId xmlns:p14="http://schemas.microsoft.com/office/powerpoint/2010/main" val="738793465"/>
+        <p14:creationId xmlns:p14="http://schemas.microsoft.com/office/powerpoint/2010/main" val="42074809"/>
       </p:ext>
     </p:extLst>
   </p:cSld>
@@ -2388,7 +2388,7 @@
           <p:cNvPr id="2" name="タイトル 1">
             <a:extLst>
               <a:ext uri="{FF2B5EF4-FFF2-40B4-BE49-F238E27FC236}">
-                <a16:creationId xmlns:a16="http://schemas.microsoft.com/office/drawing/2014/main" id="{0BFE13CD-63A8-B03A-566E-8EE92A578F81}"/>
+                <a16:creationId xmlns:a16="http://schemas.microsoft.com/office/drawing/2014/main" id="{139D10E6-4820-1DA2-621D-5FAD56912817}"/>
               </a:ext>
             </a:extLst>
           </p:cNvPr>
@@ -2425,7 +2425,7 @@
           <p:cNvPr id="3" name="コンテンツ プレースホルダー 2">
             <a:extLst>
               <a:ext uri="{FF2B5EF4-FFF2-40B4-BE49-F238E27FC236}">
-                <a16:creationId xmlns:a16="http://schemas.microsoft.com/office/drawing/2014/main" id="{F6481809-B9FD-58FC-B643-FEF26B86C694}"/>
+                <a16:creationId xmlns:a16="http://schemas.microsoft.com/office/drawing/2014/main" id="{F11CE240-EC3B-85A6-2DED-8586160E9CAC}"/>
               </a:ext>
             </a:extLst>
           </p:cNvPr>
@@ -2547,7 +2547,7 @@
           <p:cNvPr id="4" name="テキスト プレースホルダー 3">
             <a:extLst>
               <a:ext uri="{FF2B5EF4-FFF2-40B4-BE49-F238E27FC236}">
-                <a16:creationId xmlns:a16="http://schemas.microsoft.com/office/drawing/2014/main" id="{BA738868-7B7D-9CC7-7E00-F2482182B5D6}"/>
+                <a16:creationId xmlns:a16="http://schemas.microsoft.com/office/drawing/2014/main" id="{3CFA42F1-6BF0-B2F7-F24D-4520461B0615}"/>
               </a:ext>
             </a:extLst>
           </p:cNvPr>
@@ -2618,7 +2618,7 @@
           <p:cNvPr id="5" name="日付プレースホルダー 4">
             <a:extLst>
               <a:ext uri="{FF2B5EF4-FFF2-40B4-BE49-F238E27FC236}">
-                <a16:creationId xmlns:a16="http://schemas.microsoft.com/office/drawing/2014/main" id="{C7896884-E67C-B092-5E9F-CCFA472E9C78}"/>
+                <a16:creationId xmlns:a16="http://schemas.microsoft.com/office/drawing/2014/main" id="{1EF0CC23-1044-78C3-BD18-F22DCE6DDF7E}"/>
               </a:ext>
             </a:extLst>
           </p:cNvPr>
@@ -2634,7 +2634,7 @@
           <a:bodyPr/>
           <a:lstStyle/>
           <a:p>
-            <a:fld id="{43E15422-BB48-4258-A2E7-EE85F92D8867}" type="datetimeFigureOut">
+            <a:fld id="{78BBC86E-792B-4DDA-9FCE-CC582720DB85}" type="datetimeFigureOut">
               <a:rPr kumimoji="1" lang="ja-JP" altLang="en-US" smtClean="0"/>
               <a:t>2026/7/30</a:t>
             </a:fld>
@@ -2647,7 +2647,7 @@
           <p:cNvPr id="6" name="フッター プレースホルダー 5">
             <a:extLst>
               <a:ext uri="{FF2B5EF4-FFF2-40B4-BE49-F238E27FC236}">
-                <a16:creationId xmlns:a16="http://schemas.microsoft.com/office/drawing/2014/main" id="{97905E66-F4AD-EE19-9541-2EB1F0C99759}"/>
+                <a16:creationId xmlns:a16="http://schemas.microsoft.com/office/drawing/2014/main" id="{817DD8D1-CB28-3AF6-3299-D3E797C3F8A6}"/>
               </a:ext>
             </a:extLst>
           </p:cNvPr>
@@ -2672,7 +2672,7 @@
           <p:cNvPr id="7" name="スライド番号プレースホルダー 6">
             <a:extLst>
               <a:ext uri="{FF2B5EF4-FFF2-40B4-BE49-F238E27FC236}">
-                <a16:creationId xmlns:a16="http://schemas.microsoft.com/office/drawing/2014/main" id="{BF3E22B2-6AED-01AF-D941-632DE573EB26}"/>
+                <a16:creationId xmlns:a16="http://schemas.microsoft.com/office/drawing/2014/main" id="{5FC07BC5-79BA-6485-3E78-4DE2CC85DD42}"/>
               </a:ext>
             </a:extLst>
           </p:cNvPr>
@@ -2688,7 +2688,7 @@
           <a:bodyPr/>
           <a:lstStyle/>
           <a:p>
-            <a:fld id="{C0E2FC2B-7929-4BA4-856B-8864C5C91A1A}" type="slidenum">
+            <a:fld id="{4C91C4C9-2D7F-4D5D-9E39-574BF1859B2F}" type="slidenum">
               <a:rPr kumimoji="1" lang="ja-JP" altLang="en-US" smtClean="0"/>
               <a:t>‹#›</a:t>
             </a:fld>
@@ -2699,7 +2699,7 @@
     </p:spTree>
     <p:extLst>
       <p:ext uri="{BB962C8B-B14F-4D97-AF65-F5344CB8AC3E}">
-        <p14:creationId xmlns:p14="http://schemas.microsoft.com/office/powerpoint/2010/main" val="2919692579"/>
+        <p14:creationId xmlns:p14="http://schemas.microsoft.com/office/powerpoint/2010/main" val="1482364850"/>
       </p:ext>
     </p:extLst>
   </p:cSld>
@@ -2731,7 +2731,7 @@
           <p:cNvPr id="2" name="タイトル 1">
             <a:extLst>
               <a:ext uri="{FF2B5EF4-FFF2-40B4-BE49-F238E27FC236}">
-                <a16:creationId xmlns:a16="http://schemas.microsoft.com/office/drawing/2014/main" id="{4B1B8163-EEFF-8364-27D6-C3B0ED6632CE}"/>
+                <a16:creationId xmlns:a16="http://schemas.microsoft.com/office/drawing/2014/main" id="{A750DD09-8287-ADA1-94B1-0BC852877E7B}"/>
               </a:ext>
             </a:extLst>
           </p:cNvPr>
@@ -2768,7 +2768,7 @@
           <p:cNvPr id="3" name="図プレースホルダー 2">
             <a:extLst>
               <a:ext uri="{FF2B5EF4-FFF2-40B4-BE49-F238E27FC236}">
-                <a16:creationId xmlns:a16="http://schemas.microsoft.com/office/drawing/2014/main" id="{4F47F2BD-9DDB-0A4A-8D03-4C8BB4103459}"/>
+                <a16:creationId xmlns:a16="http://schemas.microsoft.com/office/drawing/2014/main" id="{50817FDA-04E9-CD1B-8D63-C076BF435467}"/>
               </a:ext>
             </a:extLst>
           </p:cNvPr>
@@ -2835,7 +2835,7 @@
           <p:cNvPr id="4" name="テキスト プレースホルダー 3">
             <a:extLst>
               <a:ext uri="{FF2B5EF4-FFF2-40B4-BE49-F238E27FC236}">
-                <a16:creationId xmlns:a16="http://schemas.microsoft.com/office/drawing/2014/main" id="{EC4DA671-DD3F-7B63-8FA6-166F1BA78302}"/>
+                <a16:creationId xmlns:a16="http://schemas.microsoft.com/office/drawing/2014/main" id="{11CEC244-6AD9-17BC-B991-044EED561ABD}"/>
               </a:ext>
             </a:extLst>
           </p:cNvPr>
@@ -2906,7 +2906,7 @@
           <p:cNvPr id="5" name="日付プレースホルダー 4">
             <a:extLst>
               <a:ext uri="{FF2B5EF4-FFF2-40B4-BE49-F238E27FC236}">
-                <a16:creationId xmlns:a16="http://schemas.microsoft.com/office/drawing/2014/main" id="{743F6663-6B59-04C1-CF0C-61939563BDE4}"/>
+                <a16:creationId xmlns:a16="http://schemas.microsoft.com/office/drawing/2014/main" id="{FC35C123-15F5-0224-2E4E-E5DD6DAE57DB}"/>
               </a:ext>
             </a:extLst>
           </p:cNvPr>
@@ -2922,7 +2922,7 @@
           <a:bodyPr/>
           <a:lstStyle/>
           <a:p>
-            <a:fld id="{43E15422-BB48-4258-A2E7-EE85F92D8867}" type="datetimeFigureOut">
+            <a:fld id="{78BBC86E-792B-4DDA-9FCE-CC582720DB85}" type="datetimeFigureOut">
               <a:rPr kumimoji="1" lang="ja-JP" altLang="en-US" smtClean="0"/>
               <a:t>2026/7/30</a:t>
             </a:fld>
@@ -2935,7 +2935,7 @@
           <p:cNvPr id="6" name="フッター プレースホルダー 5">
             <a:extLst>
               <a:ext uri="{FF2B5EF4-FFF2-40B4-BE49-F238E27FC236}">
-                <a16:creationId xmlns:a16="http://schemas.microsoft.com/office/drawing/2014/main" id="{8FC7397A-4085-1E25-FC6E-879063E10005}"/>
+                <a16:creationId xmlns:a16="http://schemas.microsoft.com/office/drawing/2014/main" id="{9BAE0CB5-BFC5-D649-072D-C9C6453ACE9F}"/>
               </a:ext>
             </a:extLst>
           </p:cNvPr>
@@ -2960,7 +2960,7 @@
           <p:cNvPr id="7" name="スライド番号プレースホルダー 6">
             <a:extLst>
               <a:ext uri="{FF2B5EF4-FFF2-40B4-BE49-F238E27FC236}">
-                <a16:creationId xmlns:a16="http://schemas.microsoft.com/office/drawing/2014/main" id="{A5C6FA58-5FFF-7D52-BCC1-8142BE55269C}"/>
+                <a16:creationId xmlns:a16="http://schemas.microsoft.com/office/drawing/2014/main" id="{9B893415-7FD8-3CD9-5DF7-9E2F4616C65B}"/>
               </a:ext>
             </a:extLst>
           </p:cNvPr>
@@ -2976,7 +2976,7 @@
           <a:bodyPr/>
           <a:lstStyle/>
           <a:p>
-            <a:fld id="{C0E2FC2B-7929-4BA4-856B-8864C5C91A1A}" type="slidenum">
+            <a:fld id="{4C91C4C9-2D7F-4D5D-9E39-574BF1859B2F}" type="slidenum">
               <a:rPr kumimoji="1" lang="ja-JP" altLang="en-US" smtClean="0"/>
               <a:t>‹#›</a:t>
             </a:fld>
@@ -2987,7 +2987,7 @@
     </p:spTree>
     <p:extLst>
       <p:ext uri="{BB962C8B-B14F-4D97-AF65-F5344CB8AC3E}">
-        <p14:creationId xmlns:p14="http://schemas.microsoft.com/office/powerpoint/2010/main" val="1963638412"/>
+        <p14:creationId xmlns:p14="http://schemas.microsoft.com/office/powerpoint/2010/main" val="3753318552"/>
       </p:ext>
     </p:extLst>
   </p:cSld>
@@ -3024,7 +3024,7 @@
           <p:cNvPr id="2" name="タイトル プレースホルダー 1">
             <a:extLst>
               <a:ext uri="{FF2B5EF4-FFF2-40B4-BE49-F238E27FC236}">
-                <a16:creationId xmlns:a16="http://schemas.microsoft.com/office/drawing/2014/main" id="{4AADF626-2AEA-1C82-007D-8F559E683BCE}"/>
+                <a16:creationId xmlns:a16="http://schemas.microsoft.com/office/drawing/2014/main" id="{2447070B-EDB2-1281-E07E-C2E4AC5274A4}"/>
               </a:ext>
             </a:extLst>
           </p:cNvPr>
@@ -3062,7 +3062,7 @@
           <p:cNvPr id="3" name="テキスト プレースホルダー 2">
             <a:extLst>
               <a:ext uri="{FF2B5EF4-FFF2-40B4-BE49-F238E27FC236}">
-                <a16:creationId xmlns:a16="http://schemas.microsoft.com/office/drawing/2014/main" id="{9C6C8F4A-0D5D-CFCE-E5AA-AF579D10D3C3}"/>
+                <a16:creationId xmlns:a16="http://schemas.microsoft.com/office/drawing/2014/main" id="{500AE674-D644-FFE6-0087-AF477FF60672}"/>
               </a:ext>
             </a:extLst>
           </p:cNvPr>
@@ -3161,7 +3161,7 @@
           <p:cNvPr id="4" name="日付プレースホルダー 3">
             <a:extLst>
               <a:ext uri="{FF2B5EF4-FFF2-40B4-BE49-F238E27FC236}">
-                <a16:creationId xmlns:a16="http://schemas.microsoft.com/office/drawing/2014/main" id="{CAC17460-FAC5-DF15-33C6-FE133663404D}"/>
+                <a16:creationId xmlns:a16="http://schemas.microsoft.com/office/drawing/2014/main" id="{152A4EEC-A75F-2A67-1CEB-EDD3EF527353}"/>
               </a:ext>
             </a:extLst>
           </p:cNvPr>
@@ -3195,7 +3195,7 @@
             </a:lvl1pPr>
           </a:lstStyle>
           <a:p>
-            <a:fld id="{43E15422-BB48-4258-A2E7-EE85F92D8867}" type="datetimeFigureOut">
+            <a:fld id="{78BBC86E-792B-4DDA-9FCE-CC582720DB85}" type="datetimeFigureOut">
               <a:rPr kumimoji="1" lang="ja-JP" altLang="en-US" smtClean="0"/>
               <a:t>2026/7/30</a:t>
             </a:fld>
@@ -3208,7 +3208,7 @@
           <p:cNvPr id="5" name="フッター プレースホルダー 4">
             <a:extLst>
               <a:ext uri="{FF2B5EF4-FFF2-40B4-BE49-F238E27FC236}">
-                <a16:creationId xmlns:a16="http://schemas.microsoft.com/office/drawing/2014/main" id="{F5CEE624-1AFF-5A6A-F452-5C75116E72BB}"/>
+                <a16:creationId xmlns:a16="http://schemas.microsoft.com/office/drawing/2014/main" id="{7374D93A-999F-1D40-647F-558AB90EC2DC}"/>
               </a:ext>
             </a:extLst>
           </p:cNvPr>
@@ -3251,7 +3251,7 @@
           <p:cNvPr id="6" name="スライド番号プレースホルダー 5">
             <a:extLst>
               <a:ext uri="{FF2B5EF4-FFF2-40B4-BE49-F238E27FC236}">
-                <a16:creationId xmlns:a16="http://schemas.microsoft.com/office/drawing/2014/main" id="{2211A891-EE21-E26E-424B-1CE749D88CDB}"/>
+                <a16:creationId xmlns:a16="http://schemas.microsoft.com/office/drawing/2014/main" id="{64B255E6-82FC-2E36-715A-EF9C6058CF6F}"/>
               </a:ext>
             </a:extLst>
           </p:cNvPr>
@@ -3285,7 +3285,7 @@
             </a:lvl1pPr>
           </a:lstStyle>
           <a:p>
-            <a:fld id="{C0E2FC2B-7929-4BA4-856B-8864C5C91A1A}" type="slidenum">
+            <a:fld id="{4C91C4C9-2D7F-4D5D-9E39-574BF1859B2F}" type="slidenum">
               <a:rPr kumimoji="1" lang="ja-JP" altLang="en-US" smtClean="0"/>
               <a:t>‹#›</a:t>
             </a:fld>
@@ -3296,7 +3296,7 @@
     </p:spTree>
     <p:extLst>
       <p:ext uri="{BB962C8B-B14F-4D97-AF65-F5344CB8AC3E}">
-        <p14:creationId xmlns:p14="http://schemas.microsoft.com/office/powerpoint/2010/main" val="1726962806"/>
+        <p14:creationId xmlns:p14="http://schemas.microsoft.com/office/powerpoint/2010/main" val="3765041046"/>
       </p:ext>
     </p:extLst>
   </p:cSld>
@@ -3619,7 +3619,7 @@
           <p:cNvPr id="2" name="テキスト ボックス 1">
             <a:extLst>
               <a:ext uri="{FF2B5EF4-FFF2-40B4-BE49-F238E27FC236}">
-                <a16:creationId xmlns:a16="http://schemas.microsoft.com/office/drawing/2014/main" id="{25B98019-BE9D-F651-14DB-DC9912A7419E}"/>
+                <a16:creationId xmlns:a16="http://schemas.microsoft.com/office/drawing/2014/main" id="{2022DDF4-9060-736D-1CCD-33B1E0653471}"/>
               </a:ext>
             </a:extLst>
           </p:cNvPr>
@@ -3665,7 +3665,7 @@
           <p:cNvPr id="3" name="テキスト ボックス 2">
             <a:extLst>
               <a:ext uri="{FF2B5EF4-FFF2-40B4-BE49-F238E27FC236}">
-                <a16:creationId xmlns:a16="http://schemas.microsoft.com/office/drawing/2014/main" id="{C4DD1499-9BD1-B70F-4DEB-BF486D6E2278}"/>
+                <a16:creationId xmlns:a16="http://schemas.microsoft.com/office/drawing/2014/main" id="{EA24F016-F090-19A0-CFB7-DBFDD014AC01}"/>
               </a:ext>
             </a:extLst>
           </p:cNvPr>
@@ -3695,14 +3695,17 @@
                 </a:solidFill>
                 <a:latin typeface="Arial" panose="020B0604020202020204" pitchFamily="34" charset="0"/>
               </a:rPr>
-              <a:t>vs-jt TECH EXPLANATION</a:t>
-            </a:r>
-            <a:endParaRPr kumimoji="1" lang="ja-JP" altLang="en-US" sz="3400" b="1">
-              <a:solidFill>
-                <a:srgbClr val="111111"/>
-              </a:solidFill>
-              <a:latin typeface="Arial" panose="020B0604020202020204" pitchFamily="34" charset="0"/>
-            </a:endParaRPr>
+              <a:t>Vs Jt</a:t>
+            </a:r>
+            <a:r>
+              <a:rPr kumimoji="1" lang="ja-JP" altLang="en-US" sz="3400" b="1">
+                <a:solidFill>
+                  <a:srgbClr val="111111"/>
+                </a:solidFill>
+                <a:latin typeface="Arial" panose="020B0604020202020204" pitchFamily="34" charset="0"/>
+              </a:rPr>
+              <a:t>の技術解説</a:t>
+            </a:r>
           </a:p>
         </p:txBody>
       </p:sp>
@@ -3711,7 +3714,7 @@
           <p:cNvPr id="4" name="テキスト ボックス 3">
             <a:extLst>
               <a:ext uri="{FF2B5EF4-FFF2-40B4-BE49-F238E27FC236}">
-                <a16:creationId xmlns:a16="http://schemas.microsoft.com/office/drawing/2014/main" id="{E966A189-F9E8-BDB8-2148-4C6E62C5A478}"/>
+                <a16:creationId xmlns:a16="http://schemas.microsoft.com/office/drawing/2014/main" id="{E577CB9A-A554-43F4-8F17-17D1F3144F1C}"/>
               </a:ext>
             </a:extLst>
           </p:cNvPr>
@@ -3735,20 +3738,14 @@
           <a:lstStyle/>
           <a:p>
             <a:r>
-              <a:rPr kumimoji="1" lang="en-US" altLang="ja-JP" sz="2000">
+              <a:rPr kumimoji="1" lang="ja-JP" altLang="en-US" sz="2000">
                 <a:solidFill>
                   <a:srgbClr val="333333"/>
                 </a:solidFill>
                 <a:latin typeface="Arial" panose="020B0604020202020204" pitchFamily="34" charset="0"/>
               </a:rPr>
-              <a:t>Architecture, implementation and commit history in 75 seconds</a:t>
-            </a:r>
-            <a:endParaRPr kumimoji="1" lang="ja-JP" altLang="en-US" sz="2000">
-              <a:solidFill>
-                <a:srgbClr val="333333"/>
-              </a:solidFill>
-              <a:latin typeface="Arial" panose="020B0604020202020204" pitchFamily="34" charset="0"/>
-            </a:endParaRPr>
+              <a:t>設計・実装・コミットから学ぶ短時間プレビュー</a:t>
+            </a:r>
           </a:p>
         </p:txBody>
       </p:sp>
@@ -3757,7 +3754,7 @@
           <p:cNvPr id="5" name="テキスト ボックス 4">
             <a:extLst>
               <a:ext uri="{FF2B5EF4-FFF2-40B4-BE49-F238E27FC236}">
-                <a16:creationId xmlns:a16="http://schemas.microsoft.com/office/drawing/2014/main" id="{AC350F23-6608-E5C9-F8F1-F2EB14F3D99D}"/>
+                <a16:creationId xmlns:a16="http://schemas.microsoft.com/office/drawing/2014/main" id="{D25D059C-A4CD-EC31-F7C2-5BD253443952}"/>
               </a:ext>
             </a:extLst>
           </p:cNvPr>
@@ -3804,7 +3801,7 @@
             <a:hlinkClick r:id="" action="ppaction://media"/>
             <a:extLst>
               <a:ext uri="{FF2B5EF4-FFF2-40B4-BE49-F238E27FC236}">
-                <a16:creationId xmlns:a16="http://schemas.microsoft.com/office/drawing/2014/main" id="{CB73749E-2459-8CF7-4DF0-2034FA9149BB}"/>
+                <a16:creationId xmlns:a16="http://schemas.microsoft.com/office/drawing/2014/main" id="{76F5C445-CF05-354E-1EFA-9A9A8756996B}"/>
               </a:ext>
             </a:extLst>
           </p:cNvPr>
@@ -3839,7 +3836,7 @@
     </p:spTree>
     <p:extLst>
       <p:ext uri="{BB962C8B-B14F-4D97-AF65-F5344CB8AC3E}">
-        <p14:creationId xmlns:p14="http://schemas.microsoft.com/office/powerpoint/2010/main" val="2774354969"/>
+        <p14:creationId xmlns:p14="http://schemas.microsoft.com/office/powerpoint/2010/main" val="3577096402"/>
       </p:ext>
     </p:extLst>
   </p:cSld>
@@ -3963,7 +3960,7 @@
           <p:cNvPr id="2" name="テキスト ボックス 1">
             <a:extLst>
               <a:ext uri="{FF2B5EF4-FFF2-40B4-BE49-F238E27FC236}">
-                <a16:creationId xmlns:a16="http://schemas.microsoft.com/office/drawing/2014/main" id="{DEA7501A-C3E4-30F3-CCFF-C1E375F191D1}"/>
+                <a16:creationId xmlns:a16="http://schemas.microsoft.com/office/drawing/2014/main" id="{DC73D165-5986-E8A6-B4B0-750A2C9E8D1D}"/>
               </a:ext>
             </a:extLst>
           </p:cNvPr>
@@ -4009,7 +4006,7 @@
           <p:cNvPr id="3" name="テキスト ボックス 2">
             <a:extLst>
               <a:ext uri="{FF2B5EF4-FFF2-40B4-BE49-F238E27FC236}">
-                <a16:creationId xmlns:a16="http://schemas.microsoft.com/office/drawing/2014/main" id="{232BE104-C5FC-49A5-7D8C-76ACDB0A6E82}"/>
+                <a16:creationId xmlns:a16="http://schemas.microsoft.com/office/drawing/2014/main" id="{AE526F81-8D3C-BC80-7DF1-C06BA5C65B8B}"/>
               </a:ext>
             </a:extLst>
           </p:cNvPr>
@@ -4033,20 +4030,14 @@
           <a:lstStyle/>
           <a:p>
             <a:r>
-              <a:rPr kumimoji="1" lang="en-US" altLang="ja-JP" sz="3400" b="1">
+              <a:rPr kumimoji="1" lang="ja-JP" altLang="en-US" sz="3400" b="1">
                 <a:solidFill>
                   <a:srgbClr val="111111"/>
                 </a:solidFill>
                 <a:latin typeface="Arial" panose="020B0604020202020204" pitchFamily="34" charset="0"/>
               </a:rPr>
-              <a:t>WHAT DOES IT SOLVE?</a:t>
-            </a:r>
-            <a:endParaRPr kumimoji="1" lang="ja-JP" altLang="en-US" sz="3400" b="1">
-              <a:solidFill>
-                <a:srgbClr val="111111"/>
-              </a:solidFill>
-              <a:latin typeface="Arial" panose="020B0604020202020204" pitchFamily="34" charset="0"/>
-            </a:endParaRPr>
+              <a:t>このプロジェクトは何を解決する？</a:t>
+            </a:r>
           </a:p>
         </p:txBody>
       </p:sp>
@@ -4055,7 +4046,7 @@
           <p:cNvPr id="4" name="テキスト ボックス 3">
             <a:extLst>
               <a:ext uri="{FF2B5EF4-FFF2-40B4-BE49-F238E27FC236}">
-                <a16:creationId xmlns:a16="http://schemas.microsoft.com/office/drawing/2014/main" id="{0FF75DFB-AEF6-036D-623D-E32ED184FB99}"/>
+                <a16:creationId xmlns:a16="http://schemas.microsoft.com/office/drawing/2014/main" id="{08E3749C-0E7B-A0AF-2421-2C22B83FCE65}"/>
               </a:ext>
             </a:extLst>
           </p:cNvPr>
@@ -4104,7 +4095,7 @@
           <p:cNvPr id="5" name="テキスト ボックス 4">
             <a:extLst>
               <a:ext uri="{FF2B5EF4-FFF2-40B4-BE49-F238E27FC236}">
-                <a16:creationId xmlns:a16="http://schemas.microsoft.com/office/drawing/2014/main" id="{E24E945D-83DA-6B16-5344-6442FBC0274F}"/>
+                <a16:creationId xmlns:a16="http://schemas.microsoft.com/office/drawing/2014/main" id="{D75BA93E-349E-4DA9-E23F-C8F9E78F033C}"/>
               </a:ext>
             </a:extLst>
           </p:cNvPr>
@@ -4151,7 +4142,7 @@
             <a:hlinkClick r:id="" action="ppaction://media"/>
             <a:extLst>
               <a:ext uri="{FF2B5EF4-FFF2-40B4-BE49-F238E27FC236}">
-                <a16:creationId xmlns:a16="http://schemas.microsoft.com/office/drawing/2014/main" id="{A013E435-7892-F32F-8556-A3928BFA5E9F}"/>
+                <a16:creationId xmlns:a16="http://schemas.microsoft.com/office/drawing/2014/main" id="{4E63AFE2-2F2D-AD77-A6F2-78D74DD36812}"/>
               </a:ext>
             </a:extLst>
           </p:cNvPr>
@@ -4186,7 +4177,7 @@
     </p:spTree>
     <p:extLst>
       <p:ext uri="{BB962C8B-B14F-4D97-AF65-F5344CB8AC3E}">
-        <p14:creationId xmlns:p14="http://schemas.microsoft.com/office/powerpoint/2010/main" val="1121357188"/>
+        <p14:creationId xmlns:p14="http://schemas.microsoft.com/office/powerpoint/2010/main" val="2575899449"/>
       </p:ext>
     </p:extLst>
   </p:cSld>
@@ -4310,7 +4301,7 @@
           <p:cNvPr id="2" name="テキスト ボックス 1">
             <a:extLst>
               <a:ext uri="{FF2B5EF4-FFF2-40B4-BE49-F238E27FC236}">
-                <a16:creationId xmlns:a16="http://schemas.microsoft.com/office/drawing/2014/main" id="{0FD11CA8-488C-0BE3-D84A-238F4AF941E7}"/>
+                <a16:creationId xmlns:a16="http://schemas.microsoft.com/office/drawing/2014/main" id="{A80BFC35-175C-FC78-C692-F900DE9D5370}"/>
               </a:ext>
             </a:extLst>
           </p:cNvPr>
@@ -4356,7 +4347,7 @@
           <p:cNvPr id="3" name="テキスト ボックス 2">
             <a:extLst>
               <a:ext uri="{FF2B5EF4-FFF2-40B4-BE49-F238E27FC236}">
-                <a16:creationId xmlns:a16="http://schemas.microsoft.com/office/drawing/2014/main" id="{A715D99C-83F0-0E47-B7C4-5A2A43F30DEF}"/>
+                <a16:creationId xmlns:a16="http://schemas.microsoft.com/office/drawing/2014/main" id="{074F5BEA-89F5-E961-AD44-46B2496A3449}"/>
               </a:ext>
             </a:extLst>
           </p:cNvPr>
@@ -4380,20 +4371,14 @@
           <a:lstStyle/>
           <a:p>
             <a:r>
-              <a:rPr kumimoji="1" lang="en-US" altLang="ja-JP" sz="3400" b="1">
+              <a:rPr kumimoji="1" lang="ja-JP" altLang="en-US" sz="3400" b="1">
                 <a:solidFill>
                   <a:srgbClr val="111111"/>
                 </a:solidFill>
                 <a:latin typeface="Arial" panose="020B0604020202020204" pitchFamily="34" charset="0"/>
               </a:rPr>
-              <a:t>TECH STACK</a:t>
-            </a:r>
-            <a:endParaRPr kumimoji="1" lang="ja-JP" altLang="en-US" sz="3400" b="1">
-              <a:solidFill>
-                <a:srgbClr val="111111"/>
-              </a:solidFill>
-              <a:latin typeface="Arial" panose="020B0604020202020204" pitchFamily="34" charset="0"/>
-            </a:endParaRPr>
+              <a:t>技術スタック</a:t>
+            </a:r>
           </a:p>
         </p:txBody>
       </p:sp>
@@ -4402,7 +4387,7 @@
           <p:cNvPr id="4" name="テキスト ボックス 3">
             <a:extLst>
               <a:ext uri="{FF2B5EF4-FFF2-40B4-BE49-F238E27FC236}">
-                <a16:creationId xmlns:a16="http://schemas.microsoft.com/office/drawing/2014/main" id="{98D54626-C66C-8B45-8B80-5A782E5A27B2}"/>
+                <a16:creationId xmlns:a16="http://schemas.microsoft.com/office/drawing/2014/main" id="{B3800A3E-4BC5-D3D7-6FED-306B44E8BF3C}"/>
               </a:ext>
             </a:extLst>
           </p:cNvPr>
@@ -4412,7 +4397,7 @@
         <p:spPr>
           <a:xfrm>
             <a:off x="533400" y="3429000"/>
-            <a:ext cx="10795000" cy="400110"/>
+            <a:ext cx="10795000" cy="707886"/>
           </a:xfrm>
           <a:prstGeom prst="rect">
             <a:avLst/>
@@ -4426,13 +4411,22 @@
           <a:lstStyle/>
           <a:p>
             <a:r>
+              <a:rPr kumimoji="1" lang="ja-JP" altLang="en-US" sz="2000">
+                <a:solidFill>
+                  <a:srgbClr val="333333"/>
+                </a:solidFill>
+                <a:latin typeface="Arial" panose="020B0604020202020204" pitchFamily="34" charset="0"/>
+              </a:rPr>
+              <a:t>主要技術：</a:t>
+            </a:r>
+            <a:r>
               <a:rPr kumimoji="1" lang="en-US" altLang="ja-JP" sz="2000">
                 <a:solidFill>
                   <a:srgbClr val="333333"/>
                 </a:solidFill>
                 <a:latin typeface="Arial" panose="020B0604020202020204" pitchFamily="34" charset="0"/>
               </a:rPr>
-              <a:t>Primary technologies: JavaScript</a:t>
+              <a:t>JavaScript</a:t>
             </a:r>
             <a:r>
               <a:rPr kumimoji="1" lang="ja-JP" altLang="en-US" sz="2000">
@@ -4486,14 +4480,18 @@
                 </a:solidFill>
                 <a:latin typeface="Arial" panose="020B0604020202020204" pitchFamily="34" charset="0"/>
               </a:rPr>
-              <a:t>CSS</a:t>
-            </a:r>
-            <a:endParaRPr kumimoji="1" lang="ja-JP" altLang="en-US" sz="2000">
-              <a:solidFill>
-                <a:srgbClr val="333333"/>
-              </a:solidFill>
-              <a:latin typeface="Arial" panose="020B0604020202020204" pitchFamily="34" charset="0"/>
-            </a:endParaRPr>
+              <a:t>CSS
+</a:t>
+            </a:r>
+            <a:r>
+              <a:rPr kumimoji="1" lang="ja-JP" altLang="en-US" sz="2000">
+                <a:solidFill>
+                  <a:srgbClr val="333333"/>
+                </a:solidFill>
+                <a:latin typeface="Arial" panose="020B0604020202020204" pitchFamily="34" charset="0"/>
+              </a:rPr>
+              <a:t>役割を分け、保守しやすい構成を目指しています。</a:t>
+            </a:r>
           </a:p>
         </p:txBody>
       </p:sp>
@@ -4502,7 +4500,7 @@
           <p:cNvPr id="5" name="テキスト ボックス 4">
             <a:extLst>
               <a:ext uri="{FF2B5EF4-FFF2-40B4-BE49-F238E27FC236}">
-                <a16:creationId xmlns:a16="http://schemas.microsoft.com/office/drawing/2014/main" id="{893E6E69-F70B-849C-C64D-B38546DCD87A}"/>
+                <a16:creationId xmlns:a16="http://schemas.microsoft.com/office/drawing/2014/main" id="{D876D6C7-028A-4E14-CA14-D6E19DF3DCA5}"/>
               </a:ext>
             </a:extLst>
           </p:cNvPr>
@@ -4549,7 +4547,7 @@
             <a:hlinkClick r:id="" action="ppaction://media"/>
             <a:extLst>
               <a:ext uri="{FF2B5EF4-FFF2-40B4-BE49-F238E27FC236}">
-                <a16:creationId xmlns:a16="http://schemas.microsoft.com/office/drawing/2014/main" id="{6C0D7E77-693D-BB04-F72A-DF020389B94E}"/>
+                <a16:creationId xmlns:a16="http://schemas.microsoft.com/office/drawing/2014/main" id="{E70B9C99-2401-F08C-6820-4362DB79A956}"/>
               </a:ext>
             </a:extLst>
           </p:cNvPr>
@@ -4584,7 +4582,7 @@
     </p:spTree>
     <p:extLst>
       <p:ext uri="{BB962C8B-B14F-4D97-AF65-F5344CB8AC3E}">
-        <p14:creationId xmlns:p14="http://schemas.microsoft.com/office/powerpoint/2010/main" val="2908892382"/>
+        <p14:creationId xmlns:p14="http://schemas.microsoft.com/office/powerpoint/2010/main" val="860723955"/>
       </p:ext>
     </p:extLst>
   </p:cSld>
@@ -4708,7 +4706,7 @@
           <p:cNvPr id="2" name="テキスト ボックス 1">
             <a:extLst>
               <a:ext uri="{FF2B5EF4-FFF2-40B4-BE49-F238E27FC236}">
-                <a16:creationId xmlns:a16="http://schemas.microsoft.com/office/drawing/2014/main" id="{AAE65F14-05F2-0C3F-8E68-E294C7C33ED2}"/>
+                <a16:creationId xmlns:a16="http://schemas.microsoft.com/office/drawing/2014/main" id="{09B95CC1-A290-523C-725C-DC6AFA68F465}"/>
               </a:ext>
             </a:extLst>
           </p:cNvPr>
@@ -4754,7 +4752,7 @@
           <p:cNvPr id="3" name="テキスト ボックス 2">
             <a:extLst>
               <a:ext uri="{FF2B5EF4-FFF2-40B4-BE49-F238E27FC236}">
-                <a16:creationId xmlns:a16="http://schemas.microsoft.com/office/drawing/2014/main" id="{DDCD680E-1EA6-79AC-3924-B1D4D4744008}"/>
+                <a16:creationId xmlns:a16="http://schemas.microsoft.com/office/drawing/2014/main" id="{AF0827F0-3EE7-ACB0-96B4-281ACDE72FF0}"/>
               </a:ext>
             </a:extLst>
           </p:cNvPr>
@@ -4778,20 +4776,14 @@
           <a:lstStyle/>
           <a:p>
             <a:r>
-              <a:rPr kumimoji="1" lang="en-US" altLang="ja-JP" sz="3400" b="1">
+              <a:rPr kumimoji="1" lang="ja-JP" altLang="en-US" sz="3400" b="1">
                 <a:solidFill>
                   <a:srgbClr val="111111"/>
                 </a:solidFill>
                 <a:latin typeface="Arial" panose="020B0604020202020204" pitchFamily="34" charset="0"/>
               </a:rPr>
-              <a:t>REPOSITORY HIGHLIGHTS</a:t>
-            </a:r>
-            <a:endParaRPr kumimoji="1" lang="ja-JP" altLang="en-US" sz="3400" b="1">
-              <a:solidFill>
-                <a:srgbClr val="111111"/>
-              </a:solidFill>
-              <a:latin typeface="Arial" panose="020B0604020202020204" pitchFamily="34" charset="0"/>
-            </a:endParaRPr>
+              <a:t>リポジトリの読みどころ</a:t>
+            </a:r>
           </a:p>
         </p:txBody>
       </p:sp>
@@ -4800,7 +4792,7 @@
           <p:cNvPr id="4" name="テキスト ボックス 3">
             <a:extLst>
               <a:ext uri="{FF2B5EF4-FFF2-40B4-BE49-F238E27FC236}">
-                <a16:creationId xmlns:a16="http://schemas.microsoft.com/office/drawing/2014/main" id="{5D3C0FB4-2963-F306-0E49-F4A857DDCCC9}"/>
+                <a16:creationId xmlns:a16="http://schemas.microsoft.com/office/drawing/2014/main" id="{B1494EAA-D0FC-B712-5610-437BBDA4A41C}"/>
               </a:ext>
             </a:extLst>
           </p:cNvPr>
@@ -4810,7 +4802,7 @@
         <p:spPr>
           <a:xfrm>
             <a:off x="533400" y="3429000"/>
-            <a:ext cx="10795000" cy="400110"/>
+            <a:ext cx="10795000" cy="707886"/>
           </a:xfrm>
           <a:prstGeom prst="rect">
             <a:avLst/>
@@ -4824,13 +4816,77 @@
           <a:lstStyle/>
           <a:p>
             <a:r>
+              <a:rPr kumimoji="1" lang="ja-JP" altLang="en-US" sz="2000">
+                <a:solidFill>
+                  <a:srgbClr val="333333"/>
+                </a:solidFill>
+                <a:latin typeface="Arial" panose="020B0604020202020204" pitchFamily="34" charset="0"/>
+              </a:rPr>
+              <a:t>公開コード、</a:t>
+            </a:r>
+            <a:r>
               <a:rPr kumimoji="1" lang="en-US" altLang="ja-JP" sz="2000">
                 <a:solidFill>
                   <a:srgbClr val="333333"/>
                 </a:solidFill>
                 <a:latin typeface="Arial" panose="020B0604020202020204" pitchFamily="34" charset="0"/>
               </a:rPr>
-              <a:t>Public source code, README and commit history reveal the design decisions.</a:t>
+              <a:t>README</a:t>
+            </a:r>
+            <a:r>
+              <a:rPr kumimoji="1" lang="ja-JP" altLang="en-US" sz="2000">
+                <a:solidFill>
+                  <a:srgbClr val="333333"/>
+                </a:solidFill>
+                <a:latin typeface="Arial" panose="020B0604020202020204" pitchFamily="34" charset="0"/>
+              </a:rPr>
+              <a:t>、コミット履歴から設計判断を確認できます。
+主なファイル：</a:t>
+            </a:r>
+            <a:r>
+              <a:rPr kumimoji="1" lang="en-US" altLang="ja-JP" sz="2000">
+                <a:solidFill>
+                  <a:srgbClr val="333333"/>
+                </a:solidFill>
+                <a:latin typeface="Arial" panose="020B0604020202020204" pitchFamily="34" charset="0"/>
+              </a:rPr>
+              <a:t>README.md</a:t>
+            </a:r>
+            <a:r>
+              <a:rPr kumimoji="1" lang="ja-JP" altLang="en-US" sz="2000">
+                <a:solidFill>
+                  <a:srgbClr val="333333"/>
+                </a:solidFill>
+                <a:latin typeface="Arial" panose="020B0604020202020204" pitchFamily="34" charset="0"/>
+              </a:rPr>
+              <a:t>、</a:t>
+            </a:r>
+            <a:r>
+              <a:rPr kumimoji="1" lang="en-US" altLang="ja-JP" sz="2000">
+                <a:solidFill>
+                  <a:srgbClr val="333333"/>
+                </a:solidFill>
+                <a:latin typeface="Arial" panose="020B0604020202020204" pitchFamily="34" charset="0"/>
+              </a:rPr>
+              <a:t>index.html</a:t>
+            </a:r>
+            <a:r>
+              <a:rPr kumimoji="1" lang="ja-JP" altLang="en-US" sz="2000">
+                <a:solidFill>
+                  <a:srgbClr val="333333"/>
+                </a:solidFill>
+                <a:latin typeface="Arial" panose="020B0604020202020204" pitchFamily="34" charset="0"/>
+              </a:rPr>
+              <a:t>、</a:t>
+            </a:r>
+            <a:r>
+              <a:rPr kumimoji="1" lang="en-US" altLang="ja-JP" sz="2000">
+                <a:solidFill>
+                  <a:srgbClr val="333333"/>
+                </a:solidFill>
+                <a:latin typeface="Arial" panose="020B0604020202020204" pitchFamily="34" charset="0"/>
+              </a:rPr>
+              <a:t>package-lock.json</a:t>
             </a:r>
             <a:endParaRPr kumimoji="1" lang="ja-JP" altLang="en-US" sz="2000">
               <a:solidFill>
@@ -4846,7 +4902,7 @@
           <p:cNvPr id="5" name="テキスト ボックス 4">
             <a:extLst>
               <a:ext uri="{FF2B5EF4-FFF2-40B4-BE49-F238E27FC236}">
-                <a16:creationId xmlns:a16="http://schemas.microsoft.com/office/drawing/2014/main" id="{548F92F4-FBE8-8BC8-A790-91B3020E2554}"/>
+                <a16:creationId xmlns:a16="http://schemas.microsoft.com/office/drawing/2014/main" id="{5ED70ABA-D1B6-A7A3-B37C-E43DA3C81F7F}"/>
               </a:ext>
             </a:extLst>
           </p:cNvPr>
@@ -4893,7 +4949,7 @@
             <a:hlinkClick r:id="" action="ppaction://media"/>
             <a:extLst>
               <a:ext uri="{FF2B5EF4-FFF2-40B4-BE49-F238E27FC236}">
-                <a16:creationId xmlns:a16="http://schemas.microsoft.com/office/drawing/2014/main" id="{730082CA-FA11-AED1-BDC1-7070F33B6CA8}"/>
+                <a16:creationId xmlns:a16="http://schemas.microsoft.com/office/drawing/2014/main" id="{2A204B7E-DB0B-5CB4-C3DC-ED36FA621159}"/>
               </a:ext>
             </a:extLst>
           </p:cNvPr>
@@ -4928,7 +4984,7 @@
     </p:spTree>
     <p:extLst>
       <p:ext uri="{BB962C8B-B14F-4D97-AF65-F5344CB8AC3E}">
-        <p14:creationId xmlns:p14="http://schemas.microsoft.com/office/powerpoint/2010/main" val="3313527138"/>
+        <p14:creationId xmlns:p14="http://schemas.microsoft.com/office/powerpoint/2010/main" val="233416673"/>
       </p:ext>
     </p:extLst>
   </p:cSld>
@@ -5052,7 +5108,7 @@
           <p:cNvPr id="2" name="テキスト ボックス 1">
             <a:extLst>
               <a:ext uri="{FF2B5EF4-FFF2-40B4-BE49-F238E27FC236}">
-                <a16:creationId xmlns:a16="http://schemas.microsoft.com/office/drawing/2014/main" id="{90C076B4-5CB9-6810-D35F-C27A87CBFD94}"/>
+                <a16:creationId xmlns:a16="http://schemas.microsoft.com/office/drawing/2014/main" id="{904D88E0-F367-B8A7-D03F-7AD916FBE00C}"/>
               </a:ext>
             </a:extLst>
           </p:cNvPr>
@@ -5098,7 +5154,7 @@
           <p:cNvPr id="3" name="テキスト ボックス 2">
             <a:extLst>
               <a:ext uri="{FF2B5EF4-FFF2-40B4-BE49-F238E27FC236}">
-                <a16:creationId xmlns:a16="http://schemas.microsoft.com/office/drawing/2014/main" id="{0E1FE988-321F-4197-E07C-5B55302B4BBD}"/>
+                <a16:creationId xmlns:a16="http://schemas.microsoft.com/office/drawing/2014/main" id="{CF6ACC92-3DDD-2960-4E23-6ACB3DD47A3F}"/>
               </a:ext>
             </a:extLst>
           </p:cNvPr>
@@ -5122,20 +5178,14 @@
           <a:lstStyle/>
           <a:p>
             <a:r>
-              <a:rPr kumimoji="1" lang="en-US" altLang="ja-JP" sz="3400" b="1">
+              <a:rPr kumimoji="1" lang="ja-JP" altLang="en-US" sz="3400" b="1">
                 <a:solidFill>
                   <a:srgbClr val="111111"/>
                 </a:solidFill>
                 <a:latin typeface="Arial" panose="020B0604020202020204" pitchFamily="34" charset="0"/>
               </a:rPr>
-              <a:t>ITERATIVE IMPROVEMENT</a:t>
-            </a:r>
-            <a:endParaRPr kumimoji="1" lang="ja-JP" altLang="en-US" sz="3400" b="1">
-              <a:solidFill>
-                <a:srgbClr val="111111"/>
-              </a:solidFill>
-              <a:latin typeface="Arial" panose="020B0604020202020204" pitchFamily="34" charset="0"/>
-            </a:endParaRPr>
+              <a:t>コミットから分かる改善</a:t>
+            </a:r>
           </a:p>
         </p:txBody>
       </p:sp>
@@ -5144,7 +5194,7 @@
           <p:cNvPr id="4" name="テキスト ボックス 3">
             <a:extLst>
               <a:ext uri="{FF2B5EF4-FFF2-40B4-BE49-F238E27FC236}">
-                <a16:creationId xmlns:a16="http://schemas.microsoft.com/office/drawing/2014/main" id="{667BE631-1255-D4F9-A145-89661AAF7C57}"/>
+                <a16:creationId xmlns:a16="http://schemas.microsoft.com/office/drawing/2014/main" id="{AFB72938-33FF-72B1-9531-FDFAF0101C2B}"/>
               </a:ext>
             </a:extLst>
           </p:cNvPr>
@@ -5174,7 +5224,7 @@
                 </a:solidFill>
                 <a:latin typeface="Arial" panose="020B0604020202020204" pitchFamily="34" charset="0"/>
               </a:rPr>
-              <a:t>Small commits continuously improve features, quality and release readiness.</a:t>
+              <a:t>Configure GitHub Pages for sugusuu.jp</a:t>
             </a:r>
             <a:endParaRPr kumimoji="1" lang="ja-JP" altLang="en-US" sz="2000">
               <a:solidFill>
@@ -5190,7 +5240,7 @@
           <p:cNvPr id="5" name="テキスト ボックス 4">
             <a:extLst>
               <a:ext uri="{FF2B5EF4-FFF2-40B4-BE49-F238E27FC236}">
-                <a16:creationId xmlns:a16="http://schemas.microsoft.com/office/drawing/2014/main" id="{FDF13942-703F-DAA6-8301-626204B5AD8A}"/>
+                <a16:creationId xmlns:a16="http://schemas.microsoft.com/office/drawing/2014/main" id="{22B187EE-98C1-ACE0-3B46-BED4A264C445}"/>
               </a:ext>
             </a:extLst>
           </p:cNvPr>
@@ -5237,7 +5287,7 @@
             <a:hlinkClick r:id="" action="ppaction://media"/>
             <a:extLst>
               <a:ext uri="{FF2B5EF4-FFF2-40B4-BE49-F238E27FC236}">
-                <a16:creationId xmlns:a16="http://schemas.microsoft.com/office/drawing/2014/main" id="{8EE796AD-5BA7-F26A-5DA0-B77858677C2F}"/>
+                <a16:creationId xmlns:a16="http://schemas.microsoft.com/office/drawing/2014/main" id="{44BF7DD4-5DDB-8F50-3B6F-D8E53F45FC8D}"/>
               </a:ext>
             </a:extLst>
           </p:cNvPr>
@@ -5272,7 +5322,7 @@
     </p:spTree>
     <p:extLst>
       <p:ext uri="{BB962C8B-B14F-4D97-AF65-F5344CB8AC3E}">
-        <p14:creationId xmlns:p14="http://schemas.microsoft.com/office/powerpoint/2010/main" val="1172389483"/>
+        <p14:creationId xmlns:p14="http://schemas.microsoft.com/office/powerpoint/2010/main" val="2257129776"/>
       </p:ext>
     </p:extLst>
   </p:cSld>
@@ -5396,7 +5446,7 @@
           <p:cNvPr id="2" name="テキスト ボックス 1">
             <a:extLst>
               <a:ext uri="{FF2B5EF4-FFF2-40B4-BE49-F238E27FC236}">
-                <a16:creationId xmlns:a16="http://schemas.microsoft.com/office/drawing/2014/main" id="{009BE668-AA35-79B9-84F6-A9A5B3C64948}"/>
+                <a16:creationId xmlns:a16="http://schemas.microsoft.com/office/drawing/2014/main" id="{3743E70C-887A-2408-0069-19A9CE3579B6}"/>
               </a:ext>
             </a:extLst>
           </p:cNvPr>
@@ -5442,7 +5492,7 @@
           <p:cNvPr id="3" name="テキスト ボックス 2">
             <a:extLst>
               <a:ext uri="{FF2B5EF4-FFF2-40B4-BE49-F238E27FC236}">
-                <a16:creationId xmlns:a16="http://schemas.microsoft.com/office/drawing/2014/main" id="{81FBB218-7979-EBD1-9454-913FC8133B32}"/>
+                <a16:creationId xmlns:a16="http://schemas.microsoft.com/office/drawing/2014/main" id="{DF991667-8548-5362-E008-1A760C7E2CC7}"/>
               </a:ext>
             </a:extLst>
           </p:cNvPr>
@@ -5466,20 +5516,14 @@
           <a:lstStyle/>
           <a:p>
             <a:r>
-              <a:rPr kumimoji="1" lang="en-US" altLang="ja-JP" sz="3400" b="1">
+              <a:rPr kumimoji="1" lang="ja-JP" altLang="en-US" sz="3400" b="1">
                 <a:solidFill>
                   <a:srgbClr val="111111"/>
                 </a:solidFill>
                 <a:latin typeface="Arial" panose="020B0604020202020204" pitchFamily="34" charset="0"/>
               </a:rPr>
-              <a:t>READ THE FULL ARTICLE</a:t>
-            </a:r>
-            <a:endParaRPr kumimoji="1" lang="ja-JP" altLang="en-US" sz="3400" b="1">
-              <a:solidFill>
-                <a:srgbClr val="111111"/>
-              </a:solidFill>
-              <a:latin typeface="Arial" panose="020B0604020202020204" pitchFamily="34" charset="0"/>
-            </a:endParaRPr>
+              <a:t>詳しくは積み上げログへ</a:t>
+            </a:r>
           </a:p>
         </p:txBody>
       </p:sp>
@@ -5488,7 +5532,7 @@
           <p:cNvPr id="4" name="テキスト ボックス 3">
             <a:extLst>
               <a:ext uri="{FF2B5EF4-FFF2-40B4-BE49-F238E27FC236}">
-                <a16:creationId xmlns:a16="http://schemas.microsoft.com/office/drawing/2014/main" id="{A807A203-482D-A024-2076-5A138AA6D4BC}"/>
+                <a16:creationId xmlns:a16="http://schemas.microsoft.com/office/drawing/2014/main" id="{C3B42BC0-C875-A49A-E3D1-44A1CF9EC361}"/>
               </a:ext>
             </a:extLst>
           </p:cNvPr>
@@ -5512,14 +5556,32 @@
           <a:lstStyle/>
           <a:p>
             <a:r>
-              <a:rPr kumimoji="1" lang="sv-SE" altLang="ja-JP" sz="2000">
+              <a:rPr kumimoji="1" lang="zh-TW" altLang="en-US" sz="2000">
+                <a:solidFill>
+                  <a:srgbClr val="333333"/>
+                </a:solidFill>
+                <a:latin typeface="Arial" panose="020B0604020202020204" pitchFamily="34" charset="0"/>
+              </a:rPr>
+              <a:t>記事： </a:t>
+            </a:r>
+            <a:r>
+              <a:rPr kumimoji="1" lang="en-US" altLang="zh-TW" sz="2000">
                 <a:solidFill>
                   <a:srgbClr val="333333"/>
                 </a:solidFill>
                 <a:latin typeface="Arial" panose="020B0604020202020204" pitchFamily="34" charset="0"/>
               </a:rPr>
               <a:t>https://syunnjack.dev/articles/vs-jt
-TSUMIAGE LOG</a:t>
+</a:t>
+            </a:r>
+            <a:r>
+              <a:rPr kumimoji="1" lang="zh-TW" altLang="en-US" sz="2000">
+                <a:solidFill>
+                  <a:srgbClr val="333333"/>
+                </a:solidFill>
+                <a:latin typeface="Arial" panose="020B0604020202020204" pitchFamily="34" charset="0"/>
+              </a:rPr>
+              <a:t>学び、作り、振り返る開発記録。</a:t>
             </a:r>
             <a:endParaRPr kumimoji="1" lang="ja-JP" altLang="en-US" sz="2000">
               <a:solidFill>
@@ -5535,7 +5597,7 @@
           <p:cNvPr id="5" name="テキスト ボックス 4">
             <a:extLst>
               <a:ext uri="{FF2B5EF4-FFF2-40B4-BE49-F238E27FC236}">
-                <a16:creationId xmlns:a16="http://schemas.microsoft.com/office/drawing/2014/main" id="{6620CA9E-8908-7C95-5D6C-500BDBADEDC4}"/>
+                <a16:creationId xmlns:a16="http://schemas.microsoft.com/office/drawing/2014/main" id="{88C1863B-B075-74D3-7A0B-570E84AA8503}"/>
               </a:ext>
             </a:extLst>
           </p:cNvPr>
@@ -5582,7 +5644,7 @@
             <a:hlinkClick r:id="" action="ppaction://media"/>
             <a:extLst>
               <a:ext uri="{FF2B5EF4-FFF2-40B4-BE49-F238E27FC236}">
-                <a16:creationId xmlns:a16="http://schemas.microsoft.com/office/drawing/2014/main" id="{478B5C0B-0F93-6060-5832-6831CF468CAD}"/>
+                <a16:creationId xmlns:a16="http://schemas.microsoft.com/office/drawing/2014/main" id="{039E3245-6F8C-838D-921E-C836529F9039}"/>
               </a:ext>
             </a:extLst>
           </p:cNvPr>
@@ -5617,7 +5679,7 @@
     </p:spTree>
     <p:extLst>
       <p:ext uri="{BB962C8B-B14F-4D97-AF65-F5344CB8AC3E}">
-        <p14:creationId xmlns:p14="http://schemas.microsoft.com/office/powerpoint/2010/main" val="4067143787"/>
+        <p14:creationId xmlns:p14="http://schemas.microsoft.com/office/powerpoint/2010/main" val="1531223270"/>
       </p:ext>
     </p:extLst>
   </p:cSld>

--- a/public/videos/repositories/vs-jt/vs-jt-tech-preview.pptx
+++ b/public/videos/repositories/vs-jt/vs-jt-tech-preview.pptx
@@ -134,7 +134,7 @@
           <p:cNvPr id="2" name="タイトル 1">
             <a:extLst>
               <a:ext uri="{FF2B5EF4-FFF2-40B4-BE49-F238E27FC236}">
-                <a16:creationId xmlns:a16="http://schemas.microsoft.com/office/drawing/2014/main" id="{7C93DA5A-6A3C-5E73-52AF-B11EA5B951D7}"/>
+                <a16:creationId xmlns:a16="http://schemas.microsoft.com/office/drawing/2014/main" id="{DFF966E2-BE20-783D-104E-FBC3D021A405}"/>
               </a:ext>
             </a:extLst>
           </p:cNvPr>
@@ -171,7 +171,7 @@
           <p:cNvPr id="3" name="字幕 2">
             <a:extLst>
               <a:ext uri="{FF2B5EF4-FFF2-40B4-BE49-F238E27FC236}">
-                <a16:creationId xmlns:a16="http://schemas.microsoft.com/office/drawing/2014/main" id="{ABB59EE4-E25C-0E04-DF28-3844D024ABC8}"/>
+                <a16:creationId xmlns:a16="http://schemas.microsoft.com/office/drawing/2014/main" id="{80157AC9-6FCB-0E76-2CA6-6E09381CD4A2}"/>
               </a:ext>
             </a:extLst>
           </p:cNvPr>
@@ -241,7 +241,7 @@
           <p:cNvPr id="4" name="日付プレースホルダー 3">
             <a:extLst>
               <a:ext uri="{FF2B5EF4-FFF2-40B4-BE49-F238E27FC236}">
-                <a16:creationId xmlns:a16="http://schemas.microsoft.com/office/drawing/2014/main" id="{13040DB8-F7E6-1B38-1F49-1BA574639187}"/>
+                <a16:creationId xmlns:a16="http://schemas.microsoft.com/office/drawing/2014/main" id="{C66B3F8C-C07F-E878-415A-6E9A371624F8}"/>
               </a:ext>
             </a:extLst>
           </p:cNvPr>
@@ -257,7 +257,7 @@
           <a:bodyPr/>
           <a:lstStyle/>
           <a:p>
-            <a:fld id="{78BBC86E-792B-4DDA-9FCE-CC582720DB85}" type="datetimeFigureOut">
+            <a:fld id="{B083C545-12FB-4062-9B14-BF23A6062F68}" type="datetimeFigureOut">
               <a:rPr kumimoji="1" lang="ja-JP" altLang="en-US" smtClean="0"/>
               <a:t>2026/7/30</a:t>
             </a:fld>
@@ -270,7 +270,7 @@
           <p:cNvPr id="5" name="フッター プレースホルダー 4">
             <a:extLst>
               <a:ext uri="{FF2B5EF4-FFF2-40B4-BE49-F238E27FC236}">
-                <a16:creationId xmlns:a16="http://schemas.microsoft.com/office/drawing/2014/main" id="{99DC634C-1F77-F417-BCF0-447CC371FC32}"/>
+                <a16:creationId xmlns:a16="http://schemas.microsoft.com/office/drawing/2014/main" id="{1815BE09-255C-ECE5-AF43-3950A6B8E6D5}"/>
               </a:ext>
             </a:extLst>
           </p:cNvPr>
@@ -295,7 +295,7 @@
           <p:cNvPr id="6" name="スライド番号プレースホルダー 5">
             <a:extLst>
               <a:ext uri="{FF2B5EF4-FFF2-40B4-BE49-F238E27FC236}">
-                <a16:creationId xmlns:a16="http://schemas.microsoft.com/office/drawing/2014/main" id="{900BFAD8-4AE7-5D9A-CE2C-A2689CA52744}"/>
+                <a16:creationId xmlns:a16="http://schemas.microsoft.com/office/drawing/2014/main" id="{E7792056-429A-8E35-2AC9-48A1263D6C9C}"/>
               </a:ext>
             </a:extLst>
           </p:cNvPr>
@@ -311,7 +311,7 @@
           <a:bodyPr/>
           <a:lstStyle/>
           <a:p>
-            <a:fld id="{4C91C4C9-2D7F-4D5D-9E39-574BF1859B2F}" type="slidenum">
+            <a:fld id="{38F0887C-0FF1-4E9F-A2C5-5279785D2C7C}" type="slidenum">
               <a:rPr kumimoji="1" lang="ja-JP" altLang="en-US" smtClean="0"/>
               <a:t>‹#›</a:t>
             </a:fld>
@@ -322,7 +322,7 @@
     </p:spTree>
     <p:extLst>
       <p:ext uri="{BB962C8B-B14F-4D97-AF65-F5344CB8AC3E}">
-        <p14:creationId xmlns:p14="http://schemas.microsoft.com/office/powerpoint/2010/main" val="3468992151"/>
+        <p14:creationId xmlns:p14="http://schemas.microsoft.com/office/powerpoint/2010/main" val="1550314566"/>
       </p:ext>
     </p:extLst>
   </p:cSld>
@@ -354,7 +354,7 @@
           <p:cNvPr id="2" name="タイトル 1">
             <a:extLst>
               <a:ext uri="{FF2B5EF4-FFF2-40B4-BE49-F238E27FC236}">
-                <a16:creationId xmlns:a16="http://schemas.microsoft.com/office/drawing/2014/main" id="{FE94FE79-BDD9-8187-6C78-A5502E1DA85F}"/>
+                <a16:creationId xmlns:a16="http://schemas.microsoft.com/office/drawing/2014/main" id="{3F22731F-F136-D353-A7AC-90BE0E35E016}"/>
               </a:ext>
             </a:extLst>
           </p:cNvPr>
@@ -382,7 +382,7 @@
           <p:cNvPr id="3" name="縦書きテキスト プレースホルダー 2">
             <a:extLst>
               <a:ext uri="{FF2B5EF4-FFF2-40B4-BE49-F238E27FC236}">
-                <a16:creationId xmlns:a16="http://schemas.microsoft.com/office/drawing/2014/main" id="{BECF79C8-E736-0BD9-67B7-C191BA0D4967}"/>
+                <a16:creationId xmlns:a16="http://schemas.microsoft.com/office/drawing/2014/main" id="{0591CE15-5C6D-D2EB-D149-06F31DE94B25}"/>
               </a:ext>
             </a:extLst>
           </p:cNvPr>
@@ -471,7 +471,7 @@
           <p:cNvPr id="4" name="日付プレースホルダー 3">
             <a:extLst>
               <a:ext uri="{FF2B5EF4-FFF2-40B4-BE49-F238E27FC236}">
-                <a16:creationId xmlns:a16="http://schemas.microsoft.com/office/drawing/2014/main" id="{064CE5F3-8EC8-EEB7-B780-45349B8CD273}"/>
+                <a16:creationId xmlns:a16="http://schemas.microsoft.com/office/drawing/2014/main" id="{0B7013B5-E3B2-93B6-0D02-BE91D68AB941}"/>
               </a:ext>
             </a:extLst>
           </p:cNvPr>
@@ -487,7 +487,7 @@
           <a:bodyPr/>
           <a:lstStyle/>
           <a:p>
-            <a:fld id="{78BBC86E-792B-4DDA-9FCE-CC582720DB85}" type="datetimeFigureOut">
+            <a:fld id="{B083C545-12FB-4062-9B14-BF23A6062F68}" type="datetimeFigureOut">
               <a:rPr kumimoji="1" lang="ja-JP" altLang="en-US" smtClean="0"/>
               <a:t>2026/7/30</a:t>
             </a:fld>
@@ -500,7 +500,7 @@
           <p:cNvPr id="5" name="フッター プレースホルダー 4">
             <a:extLst>
               <a:ext uri="{FF2B5EF4-FFF2-40B4-BE49-F238E27FC236}">
-                <a16:creationId xmlns:a16="http://schemas.microsoft.com/office/drawing/2014/main" id="{40AEC096-2E12-B77C-6150-B860CC7458BB}"/>
+                <a16:creationId xmlns:a16="http://schemas.microsoft.com/office/drawing/2014/main" id="{BFB22E66-9CFD-DB06-B466-0691BF88CFB1}"/>
               </a:ext>
             </a:extLst>
           </p:cNvPr>
@@ -525,7 +525,7 @@
           <p:cNvPr id="6" name="スライド番号プレースホルダー 5">
             <a:extLst>
               <a:ext uri="{FF2B5EF4-FFF2-40B4-BE49-F238E27FC236}">
-                <a16:creationId xmlns:a16="http://schemas.microsoft.com/office/drawing/2014/main" id="{EAA5A42B-1362-D492-6FD3-7CC2E843A91E}"/>
+                <a16:creationId xmlns:a16="http://schemas.microsoft.com/office/drawing/2014/main" id="{54BBA1BB-C816-8DB6-2A53-23DDB95EA2DE}"/>
               </a:ext>
             </a:extLst>
           </p:cNvPr>
@@ -541,7 +541,7 @@
           <a:bodyPr/>
           <a:lstStyle/>
           <a:p>
-            <a:fld id="{4C91C4C9-2D7F-4D5D-9E39-574BF1859B2F}" type="slidenum">
+            <a:fld id="{38F0887C-0FF1-4E9F-A2C5-5279785D2C7C}" type="slidenum">
               <a:rPr kumimoji="1" lang="ja-JP" altLang="en-US" smtClean="0"/>
               <a:t>‹#›</a:t>
             </a:fld>
@@ -552,7 +552,7 @@
     </p:spTree>
     <p:extLst>
       <p:ext uri="{BB962C8B-B14F-4D97-AF65-F5344CB8AC3E}">
-        <p14:creationId xmlns:p14="http://schemas.microsoft.com/office/powerpoint/2010/main" val="2340041083"/>
+        <p14:creationId xmlns:p14="http://schemas.microsoft.com/office/powerpoint/2010/main" val="2201267697"/>
       </p:ext>
     </p:extLst>
   </p:cSld>
@@ -584,7 +584,7 @@
           <p:cNvPr id="2" name="縦書きタイトル 1">
             <a:extLst>
               <a:ext uri="{FF2B5EF4-FFF2-40B4-BE49-F238E27FC236}">
-                <a16:creationId xmlns:a16="http://schemas.microsoft.com/office/drawing/2014/main" id="{506C2A66-9A6F-6E5A-ED09-7E7446BD64E6}"/>
+                <a16:creationId xmlns:a16="http://schemas.microsoft.com/office/drawing/2014/main" id="{7D0B9921-77DE-E1CA-92F9-931F8A24B8C2}"/>
               </a:ext>
             </a:extLst>
           </p:cNvPr>
@@ -617,7 +617,7 @@
           <p:cNvPr id="3" name="縦書きテキスト プレースホルダー 2">
             <a:extLst>
               <a:ext uri="{FF2B5EF4-FFF2-40B4-BE49-F238E27FC236}">
-                <a16:creationId xmlns:a16="http://schemas.microsoft.com/office/drawing/2014/main" id="{168BEE9A-1893-AB73-1314-9D9A13A09317}"/>
+                <a16:creationId xmlns:a16="http://schemas.microsoft.com/office/drawing/2014/main" id="{6A3AF7AB-895F-5CCE-92D9-A69F3A2AF054}"/>
               </a:ext>
             </a:extLst>
           </p:cNvPr>
@@ -711,7 +711,7 @@
           <p:cNvPr id="4" name="日付プレースホルダー 3">
             <a:extLst>
               <a:ext uri="{FF2B5EF4-FFF2-40B4-BE49-F238E27FC236}">
-                <a16:creationId xmlns:a16="http://schemas.microsoft.com/office/drawing/2014/main" id="{76BA2D3A-9C0C-0A9F-1A71-7CDE72986923}"/>
+                <a16:creationId xmlns:a16="http://schemas.microsoft.com/office/drawing/2014/main" id="{C233EDDF-A162-30E6-5BF6-479EC5852F3B}"/>
               </a:ext>
             </a:extLst>
           </p:cNvPr>
@@ -727,7 +727,7 @@
           <a:bodyPr/>
           <a:lstStyle/>
           <a:p>
-            <a:fld id="{78BBC86E-792B-4DDA-9FCE-CC582720DB85}" type="datetimeFigureOut">
+            <a:fld id="{B083C545-12FB-4062-9B14-BF23A6062F68}" type="datetimeFigureOut">
               <a:rPr kumimoji="1" lang="ja-JP" altLang="en-US" smtClean="0"/>
               <a:t>2026/7/30</a:t>
             </a:fld>
@@ -740,7 +740,7 @@
           <p:cNvPr id="5" name="フッター プレースホルダー 4">
             <a:extLst>
               <a:ext uri="{FF2B5EF4-FFF2-40B4-BE49-F238E27FC236}">
-                <a16:creationId xmlns:a16="http://schemas.microsoft.com/office/drawing/2014/main" id="{F8336A86-1C34-7D81-140E-41072006E17A}"/>
+                <a16:creationId xmlns:a16="http://schemas.microsoft.com/office/drawing/2014/main" id="{E8131297-0CEE-875E-0D6F-FE4C33AD80B7}"/>
               </a:ext>
             </a:extLst>
           </p:cNvPr>
@@ -765,7 +765,7 @@
           <p:cNvPr id="6" name="スライド番号プレースホルダー 5">
             <a:extLst>
               <a:ext uri="{FF2B5EF4-FFF2-40B4-BE49-F238E27FC236}">
-                <a16:creationId xmlns:a16="http://schemas.microsoft.com/office/drawing/2014/main" id="{CE25CE08-9E7E-C0E5-C156-13160862709E}"/>
+                <a16:creationId xmlns:a16="http://schemas.microsoft.com/office/drawing/2014/main" id="{4D44E529-6EE8-6D9B-87FD-7161C9672316}"/>
               </a:ext>
             </a:extLst>
           </p:cNvPr>
@@ -781,7 +781,7 @@
           <a:bodyPr/>
           <a:lstStyle/>
           <a:p>
-            <a:fld id="{4C91C4C9-2D7F-4D5D-9E39-574BF1859B2F}" type="slidenum">
+            <a:fld id="{38F0887C-0FF1-4E9F-A2C5-5279785D2C7C}" type="slidenum">
               <a:rPr kumimoji="1" lang="ja-JP" altLang="en-US" smtClean="0"/>
               <a:t>‹#›</a:t>
             </a:fld>
@@ -792,7 +792,7 @@
     </p:spTree>
     <p:extLst>
       <p:ext uri="{BB962C8B-B14F-4D97-AF65-F5344CB8AC3E}">
-        <p14:creationId xmlns:p14="http://schemas.microsoft.com/office/powerpoint/2010/main" val="3217670590"/>
+        <p14:creationId xmlns:p14="http://schemas.microsoft.com/office/powerpoint/2010/main" val="2762095697"/>
       </p:ext>
     </p:extLst>
   </p:cSld>
@@ -824,7 +824,7 @@
           <p:cNvPr id="2" name="タイトル 1">
             <a:extLst>
               <a:ext uri="{FF2B5EF4-FFF2-40B4-BE49-F238E27FC236}">
-                <a16:creationId xmlns:a16="http://schemas.microsoft.com/office/drawing/2014/main" id="{0A568CBE-FE56-66A6-CFF1-8E736BAE11CC}"/>
+                <a16:creationId xmlns:a16="http://schemas.microsoft.com/office/drawing/2014/main" id="{C681D80C-2A7E-28B6-E976-1E6480D343E0}"/>
               </a:ext>
             </a:extLst>
           </p:cNvPr>
@@ -852,7 +852,7 @@
           <p:cNvPr id="3" name="コンテンツ プレースホルダー 2">
             <a:extLst>
               <a:ext uri="{FF2B5EF4-FFF2-40B4-BE49-F238E27FC236}">
-                <a16:creationId xmlns:a16="http://schemas.microsoft.com/office/drawing/2014/main" id="{F3865352-7B57-CD14-D556-8EEB326376BA}"/>
+                <a16:creationId xmlns:a16="http://schemas.microsoft.com/office/drawing/2014/main" id="{BF1995A3-1832-70F3-738A-7E09C03B2E38}"/>
               </a:ext>
             </a:extLst>
           </p:cNvPr>
@@ -941,7 +941,7 @@
           <p:cNvPr id="4" name="日付プレースホルダー 3">
             <a:extLst>
               <a:ext uri="{FF2B5EF4-FFF2-40B4-BE49-F238E27FC236}">
-                <a16:creationId xmlns:a16="http://schemas.microsoft.com/office/drawing/2014/main" id="{82DDE1EA-6866-9914-FDFF-32CE0AA1CA59}"/>
+                <a16:creationId xmlns:a16="http://schemas.microsoft.com/office/drawing/2014/main" id="{CCBCC184-0D61-FC52-3F2E-C8CE3B137031}"/>
               </a:ext>
             </a:extLst>
           </p:cNvPr>
@@ -957,7 +957,7 @@
           <a:bodyPr/>
           <a:lstStyle/>
           <a:p>
-            <a:fld id="{78BBC86E-792B-4DDA-9FCE-CC582720DB85}" type="datetimeFigureOut">
+            <a:fld id="{B083C545-12FB-4062-9B14-BF23A6062F68}" type="datetimeFigureOut">
               <a:rPr kumimoji="1" lang="ja-JP" altLang="en-US" smtClean="0"/>
               <a:t>2026/7/30</a:t>
             </a:fld>
@@ -970,7 +970,7 @@
           <p:cNvPr id="5" name="フッター プレースホルダー 4">
             <a:extLst>
               <a:ext uri="{FF2B5EF4-FFF2-40B4-BE49-F238E27FC236}">
-                <a16:creationId xmlns:a16="http://schemas.microsoft.com/office/drawing/2014/main" id="{AD80AC3B-B6BF-6C9F-7F1B-9CADF0E1443A}"/>
+                <a16:creationId xmlns:a16="http://schemas.microsoft.com/office/drawing/2014/main" id="{75C5D7D3-BF14-8D2B-D655-A2E02079B580}"/>
               </a:ext>
             </a:extLst>
           </p:cNvPr>
@@ -995,7 +995,7 @@
           <p:cNvPr id="6" name="スライド番号プレースホルダー 5">
             <a:extLst>
               <a:ext uri="{FF2B5EF4-FFF2-40B4-BE49-F238E27FC236}">
-                <a16:creationId xmlns:a16="http://schemas.microsoft.com/office/drawing/2014/main" id="{ECA576FE-FBD2-DD3C-6B84-348024ECF9BE}"/>
+                <a16:creationId xmlns:a16="http://schemas.microsoft.com/office/drawing/2014/main" id="{C0A12EA4-2386-5110-7493-8A632A4B7C44}"/>
               </a:ext>
             </a:extLst>
           </p:cNvPr>
@@ -1011,7 +1011,7 @@
           <a:bodyPr/>
           <a:lstStyle/>
           <a:p>
-            <a:fld id="{4C91C4C9-2D7F-4D5D-9E39-574BF1859B2F}" type="slidenum">
+            <a:fld id="{38F0887C-0FF1-4E9F-A2C5-5279785D2C7C}" type="slidenum">
               <a:rPr kumimoji="1" lang="ja-JP" altLang="en-US" smtClean="0"/>
               <a:t>‹#›</a:t>
             </a:fld>
@@ -1022,7 +1022,7 @@
     </p:spTree>
     <p:extLst>
       <p:ext uri="{BB962C8B-B14F-4D97-AF65-F5344CB8AC3E}">
-        <p14:creationId xmlns:p14="http://schemas.microsoft.com/office/powerpoint/2010/main" val="1819806035"/>
+        <p14:creationId xmlns:p14="http://schemas.microsoft.com/office/powerpoint/2010/main" val="956209053"/>
       </p:ext>
     </p:extLst>
   </p:cSld>
@@ -1054,7 +1054,7 @@
           <p:cNvPr id="2" name="タイトル 1">
             <a:extLst>
               <a:ext uri="{FF2B5EF4-FFF2-40B4-BE49-F238E27FC236}">
-                <a16:creationId xmlns:a16="http://schemas.microsoft.com/office/drawing/2014/main" id="{E3C0C8F2-9CE3-114C-891A-4DC3DDCCFA2B}"/>
+                <a16:creationId xmlns:a16="http://schemas.microsoft.com/office/drawing/2014/main" id="{527F9A06-28F1-69A4-C7EC-76A92494D344}"/>
               </a:ext>
             </a:extLst>
           </p:cNvPr>
@@ -1091,7 +1091,7 @@
           <p:cNvPr id="3" name="テキスト プレースホルダー 2">
             <a:extLst>
               <a:ext uri="{FF2B5EF4-FFF2-40B4-BE49-F238E27FC236}">
-                <a16:creationId xmlns:a16="http://schemas.microsoft.com/office/drawing/2014/main" id="{2A722892-E837-8EF5-9C56-FC4059EA49FA}"/>
+                <a16:creationId xmlns:a16="http://schemas.microsoft.com/office/drawing/2014/main" id="{54177774-2D65-0181-2911-A83E8427D64A}"/>
               </a:ext>
             </a:extLst>
           </p:cNvPr>
@@ -1216,7 +1216,7 @@
           <p:cNvPr id="4" name="日付プレースホルダー 3">
             <a:extLst>
               <a:ext uri="{FF2B5EF4-FFF2-40B4-BE49-F238E27FC236}">
-                <a16:creationId xmlns:a16="http://schemas.microsoft.com/office/drawing/2014/main" id="{B7ACB3F2-6349-50DC-8FB4-27914DE04B47}"/>
+                <a16:creationId xmlns:a16="http://schemas.microsoft.com/office/drawing/2014/main" id="{7EB960A1-7759-77B9-FE19-63758CB17C51}"/>
               </a:ext>
             </a:extLst>
           </p:cNvPr>
@@ -1232,7 +1232,7 @@
           <a:bodyPr/>
           <a:lstStyle/>
           <a:p>
-            <a:fld id="{78BBC86E-792B-4DDA-9FCE-CC582720DB85}" type="datetimeFigureOut">
+            <a:fld id="{B083C545-12FB-4062-9B14-BF23A6062F68}" type="datetimeFigureOut">
               <a:rPr kumimoji="1" lang="ja-JP" altLang="en-US" smtClean="0"/>
               <a:t>2026/7/30</a:t>
             </a:fld>
@@ -1245,7 +1245,7 @@
           <p:cNvPr id="5" name="フッター プレースホルダー 4">
             <a:extLst>
               <a:ext uri="{FF2B5EF4-FFF2-40B4-BE49-F238E27FC236}">
-                <a16:creationId xmlns:a16="http://schemas.microsoft.com/office/drawing/2014/main" id="{B3590232-667F-5215-0403-4F37AC963D8F}"/>
+                <a16:creationId xmlns:a16="http://schemas.microsoft.com/office/drawing/2014/main" id="{2E588594-05E7-524F-6FBB-32C519048DB4}"/>
               </a:ext>
             </a:extLst>
           </p:cNvPr>
@@ -1270,7 +1270,7 @@
           <p:cNvPr id="6" name="スライド番号プレースホルダー 5">
             <a:extLst>
               <a:ext uri="{FF2B5EF4-FFF2-40B4-BE49-F238E27FC236}">
-                <a16:creationId xmlns:a16="http://schemas.microsoft.com/office/drawing/2014/main" id="{643E8C5C-33B2-B91C-A131-1E6B4312831C}"/>
+                <a16:creationId xmlns:a16="http://schemas.microsoft.com/office/drawing/2014/main" id="{0E8C16C2-C42D-E61F-E249-BCF9C7571609}"/>
               </a:ext>
             </a:extLst>
           </p:cNvPr>
@@ -1286,7 +1286,7 @@
           <a:bodyPr/>
           <a:lstStyle/>
           <a:p>
-            <a:fld id="{4C91C4C9-2D7F-4D5D-9E39-574BF1859B2F}" type="slidenum">
+            <a:fld id="{38F0887C-0FF1-4E9F-A2C5-5279785D2C7C}" type="slidenum">
               <a:rPr kumimoji="1" lang="ja-JP" altLang="en-US" smtClean="0"/>
               <a:t>‹#›</a:t>
             </a:fld>
@@ -1297,7 +1297,7 @@
     </p:spTree>
     <p:extLst>
       <p:ext uri="{BB962C8B-B14F-4D97-AF65-F5344CB8AC3E}">
-        <p14:creationId xmlns:p14="http://schemas.microsoft.com/office/powerpoint/2010/main" val="3861723536"/>
+        <p14:creationId xmlns:p14="http://schemas.microsoft.com/office/powerpoint/2010/main" val="1374526730"/>
       </p:ext>
     </p:extLst>
   </p:cSld>
@@ -1329,7 +1329,7 @@
           <p:cNvPr id="2" name="タイトル 1">
             <a:extLst>
               <a:ext uri="{FF2B5EF4-FFF2-40B4-BE49-F238E27FC236}">
-                <a16:creationId xmlns:a16="http://schemas.microsoft.com/office/drawing/2014/main" id="{648612D3-1D18-4356-5118-336215AEE8AB}"/>
+                <a16:creationId xmlns:a16="http://schemas.microsoft.com/office/drawing/2014/main" id="{0DEC5556-3495-84F4-F3FC-0375F52CE696}"/>
               </a:ext>
             </a:extLst>
           </p:cNvPr>
@@ -1357,7 +1357,7 @@
           <p:cNvPr id="3" name="コンテンツ プレースホルダー 2">
             <a:extLst>
               <a:ext uri="{FF2B5EF4-FFF2-40B4-BE49-F238E27FC236}">
-                <a16:creationId xmlns:a16="http://schemas.microsoft.com/office/drawing/2014/main" id="{BC15DF0E-5E9F-E3C8-94D4-F95DE1633C61}"/>
+                <a16:creationId xmlns:a16="http://schemas.microsoft.com/office/drawing/2014/main" id="{BA9E71F7-B625-C544-B776-B95ABDE4416E}"/>
               </a:ext>
             </a:extLst>
           </p:cNvPr>
@@ -1451,7 +1451,7 @@
           <p:cNvPr id="4" name="コンテンツ プレースホルダー 3">
             <a:extLst>
               <a:ext uri="{FF2B5EF4-FFF2-40B4-BE49-F238E27FC236}">
-                <a16:creationId xmlns:a16="http://schemas.microsoft.com/office/drawing/2014/main" id="{457730FE-8106-F2A8-54AD-75CB07A3A73B}"/>
+                <a16:creationId xmlns:a16="http://schemas.microsoft.com/office/drawing/2014/main" id="{D816AA07-CF8B-962D-A3D4-5F7750DB3CD9}"/>
               </a:ext>
             </a:extLst>
           </p:cNvPr>
@@ -1545,7 +1545,7 @@
           <p:cNvPr id="5" name="日付プレースホルダー 4">
             <a:extLst>
               <a:ext uri="{FF2B5EF4-FFF2-40B4-BE49-F238E27FC236}">
-                <a16:creationId xmlns:a16="http://schemas.microsoft.com/office/drawing/2014/main" id="{0040F4CC-F1C6-7E3B-3BB3-A93769A4F3ED}"/>
+                <a16:creationId xmlns:a16="http://schemas.microsoft.com/office/drawing/2014/main" id="{BD6E1DDC-8857-DAC2-52D2-E150CD543F14}"/>
               </a:ext>
             </a:extLst>
           </p:cNvPr>
@@ -1561,7 +1561,7 @@
           <a:bodyPr/>
           <a:lstStyle/>
           <a:p>
-            <a:fld id="{78BBC86E-792B-4DDA-9FCE-CC582720DB85}" type="datetimeFigureOut">
+            <a:fld id="{B083C545-12FB-4062-9B14-BF23A6062F68}" type="datetimeFigureOut">
               <a:rPr kumimoji="1" lang="ja-JP" altLang="en-US" smtClean="0"/>
               <a:t>2026/7/30</a:t>
             </a:fld>
@@ -1574,7 +1574,7 @@
           <p:cNvPr id="6" name="フッター プレースホルダー 5">
             <a:extLst>
               <a:ext uri="{FF2B5EF4-FFF2-40B4-BE49-F238E27FC236}">
-                <a16:creationId xmlns:a16="http://schemas.microsoft.com/office/drawing/2014/main" id="{DE54F1B3-5F27-B854-7D51-B30474743E06}"/>
+                <a16:creationId xmlns:a16="http://schemas.microsoft.com/office/drawing/2014/main" id="{4FE32D2C-D795-6FE7-0BF5-F3C900B6D60B}"/>
               </a:ext>
             </a:extLst>
           </p:cNvPr>
@@ -1599,7 +1599,7 @@
           <p:cNvPr id="7" name="スライド番号プレースホルダー 6">
             <a:extLst>
               <a:ext uri="{FF2B5EF4-FFF2-40B4-BE49-F238E27FC236}">
-                <a16:creationId xmlns:a16="http://schemas.microsoft.com/office/drawing/2014/main" id="{33075098-F15E-43BE-B600-BBBFF864BCDB}"/>
+                <a16:creationId xmlns:a16="http://schemas.microsoft.com/office/drawing/2014/main" id="{A419EF16-5F9D-D46C-63C6-20DEA94D2437}"/>
               </a:ext>
             </a:extLst>
           </p:cNvPr>
@@ -1615,7 +1615,7 @@
           <a:bodyPr/>
           <a:lstStyle/>
           <a:p>
-            <a:fld id="{4C91C4C9-2D7F-4D5D-9E39-574BF1859B2F}" type="slidenum">
+            <a:fld id="{38F0887C-0FF1-4E9F-A2C5-5279785D2C7C}" type="slidenum">
               <a:rPr kumimoji="1" lang="ja-JP" altLang="en-US" smtClean="0"/>
               <a:t>‹#›</a:t>
             </a:fld>
@@ -1626,7 +1626,7 @@
     </p:spTree>
     <p:extLst>
       <p:ext uri="{BB962C8B-B14F-4D97-AF65-F5344CB8AC3E}">
-        <p14:creationId xmlns:p14="http://schemas.microsoft.com/office/powerpoint/2010/main" val="2550394025"/>
+        <p14:creationId xmlns:p14="http://schemas.microsoft.com/office/powerpoint/2010/main" val="656987961"/>
       </p:ext>
     </p:extLst>
   </p:cSld>
@@ -1658,7 +1658,7 @@
           <p:cNvPr id="2" name="タイトル 1">
             <a:extLst>
               <a:ext uri="{FF2B5EF4-FFF2-40B4-BE49-F238E27FC236}">
-                <a16:creationId xmlns:a16="http://schemas.microsoft.com/office/drawing/2014/main" id="{3B6BF9AF-7FCA-6003-156E-3BB9EAF9D37B}"/>
+                <a16:creationId xmlns:a16="http://schemas.microsoft.com/office/drawing/2014/main" id="{A9B923D7-0EDA-A459-9AB4-6F87DB53F1AA}"/>
               </a:ext>
             </a:extLst>
           </p:cNvPr>
@@ -1691,7 +1691,7 @@
           <p:cNvPr id="3" name="テキスト プレースホルダー 2">
             <a:extLst>
               <a:ext uri="{FF2B5EF4-FFF2-40B4-BE49-F238E27FC236}">
-                <a16:creationId xmlns:a16="http://schemas.microsoft.com/office/drawing/2014/main" id="{703617DA-2818-7405-4BF8-B8759CA74B54}"/>
+                <a16:creationId xmlns:a16="http://schemas.microsoft.com/office/drawing/2014/main" id="{9C7984B4-9607-6A73-F685-65382DB9345B}"/>
               </a:ext>
             </a:extLst>
           </p:cNvPr>
@@ -1762,7 +1762,7 @@
           <p:cNvPr id="4" name="コンテンツ プレースホルダー 3">
             <a:extLst>
               <a:ext uri="{FF2B5EF4-FFF2-40B4-BE49-F238E27FC236}">
-                <a16:creationId xmlns:a16="http://schemas.microsoft.com/office/drawing/2014/main" id="{3359E738-1A2C-06AA-E2F4-5A07FD09AD43}"/>
+                <a16:creationId xmlns:a16="http://schemas.microsoft.com/office/drawing/2014/main" id="{C20DA571-CD10-D98C-F928-CEC8C8ECC4F2}"/>
               </a:ext>
             </a:extLst>
           </p:cNvPr>
@@ -1856,7 +1856,7 @@
           <p:cNvPr id="5" name="テキスト プレースホルダー 4">
             <a:extLst>
               <a:ext uri="{FF2B5EF4-FFF2-40B4-BE49-F238E27FC236}">
-                <a16:creationId xmlns:a16="http://schemas.microsoft.com/office/drawing/2014/main" id="{628F7629-5BB3-052B-3C67-54D05D1F224D}"/>
+                <a16:creationId xmlns:a16="http://schemas.microsoft.com/office/drawing/2014/main" id="{3C77B3C6-A4D5-1DDA-57EE-BE1FEFD06855}"/>
               </a:ext>
             </a:extLst>
           </p:cNvPr>
@@ -1927,7 +1927,7 @@
           <p:cNvPr id="6" name="コンテンツ プレースホルダー 5">
             <a:extLst>
               <a:ext uri="{FF2B5EF4-FFF2-40B4-BE49-F238E27FC236}">
-                <a16:creationId xmlns:a16="http://schemas.microsoft.com/office/drawing/2014/main" id="{33536135-930C-21E6-DC79-6C03251D0233}"/>
+                <a16:creationId xmlns:a16="http://schemas.microsoft.com/office/drawing/2014/main" id="{31E45CBF-61D0-1C45-16C8-82A7191DAD93}"/>
               </a:ext>
             </a:extLst>
           </p:cNvPr>
@@ -2021,7 +2021,7 @@
           <p:cNvPr id="7" name="日付プレースホルダー 6">
             <a:extLst>
               <a:ext uri="{FF2B5EF4-FFF2-40B4-BE49-F238E27FC236}">
-                <a16:creationId xmlns:a16="http://schemas.microsoft.com/office/drawing/2014/main" id="{7BA44AA7-1ABE-DACB-C324-CA659144B75B}"/>
+                <a16:creationId xmlns:a16="http://schemas.microsoft.com/office/drawing/2014/main" id="{891F6C67-C465-309B-E271-8826A8EC3192}"/>
               </a:ext>
             </a:extLst>
           </p:cNvPr>
@@ -2037,7 +2037,7 @@
           <a:bodyPr/>
           <a:lstStyle/>
           <a:p>
-            <a:fld id="{78BBC86E-792B-4DDA-9FCE-CC582720DB85}" type="datetimeFigureOut">
+            <a:fld id="{B083C545-12FB-4062-9B14-BF23A6062F68}" type="datetimeFigureOut">
               <a:rPr kumimoji="1" lang="ja-JP" altLang="en-US" smtClean="0"/>
               <a:t>2026/7/30</a:t>
             </a:fld>
@@ -2050,7 +2050,7 @@
           <p:cNvPr id="8" name="フッター プレースホルダー 7">
             <a:extLst>
               <a:ext uri="{FF2B5EF4-FFF2-40B4-BE49-F238E27FC236}">
-                <a16:creationId xmlns:a16="http://schemas.microsoft.com/office/drawing/2014/main" id="{087CB2C9-DD83-9AFF-E98F-71C2CE62E58F}"/>
+                <a16:creationId xmlns:a16="http://schemas.microsoft.com/office/drawing/2014/main" id="{666AFAA7-348B-92BD-CBBE-4078593E3B7A}"/>
               </a:ext>
             </a:extLst>
           </p:cNvPr>
@@ -2075,7 +2075,7 @@
           <p:cNvPr id="9" name="スライド番号プレースホルダー 8">
             <a:extLst>
               <a:ext uri="{FF2B5EF4-FFF2-40B4-BE49-F238E27FC236}">
-                <a16:creationId xmlns:a16="http://schemas.microsoft.com/office/drawing/2014/main" id="{683FC0F1-A4F1-A670-1A71-21F220F8DC3D}"/>
+                <a16:creationId xmlns:a16="http://schemas.microsoft.com/office/drawing/2014/main" id="{34D37335-9EC0-865D-ED3F-1D26C81DE2D5}"/>
               </a:ext>
             </a:extLst>
           </p:cNvPr>
@@ -2091,7 +2091,7 @@
           <a:bodyPr/>
           <a:lstStyle/>
           <a:p>
-            <a:fld id="{4C91C4C9-2D7F-4D5D-9E39-574BF1859B2F}" type="slidenum">
+            <a:fld id="{38F0887C-0FF1-4E9F-A2C5-5279785D2C7C}" type="slidenum">
               <a:rPr kumimoji="1" lang="ja-JP" altLang="en-US" smtClean="0"/>
               <a:t>‹#›</a:t>
             </a:fld>
@@ -2102,7 +2102,7 @@
     </p:spTree>
     <p:extLst>
       <p:ext uri="{BB962C8B-B14F-4D97-AF65-F5344CB8AC3E}">
-        <p14:creationId xmlns:p14="http://schemas.microsoft.com/office/powerpoint/2010/main" val="2943295853"/>
+        <p14:creationId xmlns:p14="http://schemas.microsoft.com/office/powerpoint/2010/main" val="1854540801"/>
       </p:ext>
     </p:extLst>
   </p:cSld>
@@ -2134,7 +2134,7 @@
           <p:cNvPr id="2" name="タイトル 1">
             <a:extLst>
               <a:ext uri="{FF2B5EF4-FFF2-40B4-BE49-F238E27FC236}">
-                <a16:creationId xmlns:a16="http://schemas.microsoft.com/office/drawing/2014/main" id="{B1CF3B26-9509-5CBC-502C-4AEB2EA6EEBF}"/>
+                <a16:creationId xmlns:a16="http://schemas.microsoft.com/office/drawing/2014/main" id="{55EFC248-9396-D4B0-C099-83F8EF4011DE}"/>
               </a:ext>
             </a:extLst>
           </p:cNvPr>
@@ -2162,7 +2162,7 @@
           <p:cNvPr id="3" name="日付プレースホルダー 2">
             <a:extLst>
               <a:ext uri="{FF2B5EF4-FFF2-40B4-BE49-F238E27FC236}">
-                <a16:creationId xmlns:a16="http://schemas.microsoft.com/office/drawing/2014/main" id="{1229B736-C0B3-3D8A-455C-6BF73B33FFEA}"/>
+                <a16:creationId xmlns:a16="http://schemas.microsoft.com/office/drawing/2014/main" id="{72DC95B6-122D-7AE4-0536-B1BE6F76348A}"/>
               </a:ext>
             </a:extLst>
           </p:cNvPr>
@@ -2178,7 +2178,7 @@
           <a:bodyPr/>
           <a:lstStyle/>
           <a:p>
-            <a:fld id="{78BBC86E-792B-4DDA-9FCE-CC582720DB85}" type="datetimeFigureOut">
+            <a:fld id="{B083C545-12FB-4062-9B14-BF23A6062F68}" type="datetimeFigureOut">
               <a:rPr kumimoji="1" lang="ja-JP" altLang="en-US" smtClean="0"/>
               <a:t>2026/7/30</a:t>
             </a:fld>
@@ -2191,7 +2191,7 @@
           <p:cNvPr id="4" name="フッター プレースホルダー 3">
             <a:extLst>
               <a:ext uri="{FF2B5EF4-FFF2-40B4-BE49-F238E27FC236}">
-                <a16:creationId xmlns:a16="http://schemas.microsoft.com/office/drawing/2014/main" id="{676EDF61-FA3D-34F7-C922-676F381E8034}"/>
+                <a16:creationId xmlns:a16="http://schemas.microsoft.com/office/drawing/2014/main" id="{25000EDF-BC2B-AAF3-2AD5-946E11B3C628}"/>
               </a:ext>
             </a:extLst>
           </p:cNvPr>
@@ -2216,7 +2216,7 @@
           <p:cNvPr id="5" name="スライド番号プレースホルダー 4">
             <a:extLst>
               <a:ext uri="{FF2B5EF4-FFF2-40B4-BE49-F238E27FC236}">
-                <a16:creationId xmlns:a16="http://schemas.microsoft.com/office/drawing/2014/main" id="{E252A059-25EB-2D59-FABE-7275CB7F8FF1}"/>
+                <a16:creationId xmlns:a16="http://schemas.microsoft.com/office/drawing/2014/main" id="{4593923E-4E91-C208-7D68-EE87864509D1}"/>
               </a:ext>
             </a:extLst>
           </p:cNvPr>
@@ -2232,7 +2232,7 @@
           <a:bodyPr/>
           <a:lstStyle/>
           <a:p>
-            <a:fld id="{4C91C4C9-2D7F-4D5D-9E39-574BF1859B2F}" type="slidenum">
+            <a:fld id="{38F0887C-0FF1-4E9F-A2C5-5279785D2C7C}" type="slidenum">
               <a:rPr kumimoji="1" lang="ja-JP" altLang="en-US" smtClean="0"/>
               <a:t>‹#›</a:t>
             </a:fld>
@@ -2243,7 +2243,7 @@
     </p:spTree>
     <p:extLst>
       <p:ext uri="{BB962C8B-B14F-4D97-AF65-F5344CB8AC3E}">
-        <p14:creationId xmlns:p14="http://schemas.microsoft.com/office/powerpoint/2010/main" val="1158678709"/>
+        <p14:creationId xmlns:p14="http://schemas.microsoft.com/office/powerpoint/2010/main" val="1747976002"/>
       </p:ext>
     </p:extLst>
   </p:cSld>
@@ -2275,7 +2275,7 @@
           <p:cNvPr id="2" name="日付プレースホルダー 1">
             <a:extLst>
               <a:ext uri="{FF2B5EF4-FFF2-40B4-BE49-F238E27FC236}">
-                <a16:creationId xmlns:a16="http://schemas.microsoft.com/office/drawing/2014/main" id="{44CAFBAC-8F21-3D73-5717-564FD2635B8C}"/>
+                <a16:creationId xmlns:a16="http://schemas.microsoft.com/office/drawing/2014/main" id="{1526D150-B9B7-309F-F485-C19E7965B765}"/>
               </a:ext>
             </a:extLst>
           </p:cNvPr>
@@ -2291,7 +2291,7 @@
           <a:bodyPr/>
           <a:lstStyle/>
           <a:p>
-            <a:fld id="{78BBC86E-792B-4DDA-9FCE-CC582720DB85}" type="datetimeFigureOut">
+            <a:fld id="{B083C545-12FB-4062-9B14-BF23A6062F68}" type="datetimeFigureOut">
               <a:rPr kumimoji="1" lang="ja-JP" altLang="en-US" smtClean="0"/>
               <a:t>2026/7/30</a:t>
             </a:fld>
@@ -2304,7 +2304,7 @@
           <p:cNvPr id="3" name="フッター プレースホルダー 2">
             <a:extLst>
               <a:ext uri="{FF2B5EF4-FFF2-40B4-BE49-F238E27FC236}">
-                <a16:creationId xmlns:a16="http://schemas.microsoft.com/office/drawing/2014/main" id="{B7BDAB11-26C1-2061-B04E-EA2DF1CE8F0B}"/>
+                <a16:creationId xmlns:a16="http://schemas.microsoft.com/office/drawing/2014/main" id="{B8930638-64C8-BC37-1C0D-2A9ABA6C015B}"/>
               </a:ext>
             </a:extLst>
           </p:cNvPr>
@@ -2329,7 +2329,7 @@
           <p:cNvPr id="4" name="スライド番号プレースホルダー 3">
             <a:extLst>
               <a:ext uri="{FF2B5EF4-FFF2-40B4-BE49-F238E27FC236}">
-                <a16:creationId xmlns:a16="http://schemas.microsoft.com/office/drawing/2014/main" id="{E76BFA24-487E-D125-8516-F81DCB97E43B}"/>
+                <a16:creationId xmlns:a16="http://schemas.microsoft.com/office/drawing/2014/main" id="{82371731-F963-008A-F273-F3566936B423}"/>
               </a:ext>
             </a:extLst>
           </p:cNvPr>
@@ -2345,7 +2345,7 @@
           <a:bodyPr/>
           <a:lstStyle/>
           <a:p>
-            <a:fld id="{4C91C4C9-2D7F-4D5D-9E39-574BF1859B2F}" type="slidenum">
+            <a:fld id="{38F0887C-0FF1-4E9F-A2C5-5279785D2C7C}" type="slidenum">
               <a:rPr kumimoji="1" lang="ja-JP" altLang="en-US" smtClean="0"/>
               <a:t>‹#›</a:t>
             </a:fld>
@@ -2356,7 +2356,7 @@
     </p:spTree>
     <p:extLst>
       <p:ext uri="{BB962C8B-B14F-4D97-AF65-F5344CB8AC3E}">
-        <p14:creationId xmlns:p14="http://schemas.microsoft.com/office/powerpoint/2010/main" val="42074809"/>
+        <p14:creationId xmlns:p14="http://schemas.microsoft.com/office/powerpoint/2010/main" val="798834085"/>
       </p:ext>
     </p:extLst>
   </p:cSld>
@@ -2388,7 +2388,7 @@
           <p:cNvPr id="2" name="タイトル 1">
             <a:extLst>
               <a:ext uri="{FF2B5EF4-FFF2-40B4-BE49-F238E27FC236}">
-                <a16:creationId xmlns:a16="http://schemas.microsoft.com/office/drawing/2014/main" id="{139D10E6-4820-1DA2-621D-5FAD56912817}"/>
+                <a16:creationId xmlns:a16="http://schemas.microsoft.com/office/drawing/2014/main" id="{3F1979E7-AF76-0EE3-38E6-D50391632844}"/>
               </a:ext>
             </a:extLst>
           </p:cNvPr>
@@ -2425,7 +2425,7 @@
           <p:cNvPr id="3" name="コンテンツ プレースホルダー 2">
             <a:extLst>
               <a:ext uri="{FF2B5EF4-FFF2-40B4-BE49-F238E27FC236}">
-                <a16:creationId xmlns:a16="http://schemas.microsoft.com/office/drawing/2014/main" id="{F11CE240-EC3B-85A6-2DED-8586160E9CAC}"/>
+                <a16:creationId xmlns:a16="http://schemas.microsoft.com/office/drawing/2014/main" id="{3920B19C-FB3B-F5BA-9A05-207FA126A4C5}"/>
               </a:ext>
             </a:extLst>
           </p:cNvPr>
@@ -2547,7 +2547,7 @@
           <p:cNvPr id="4" name="テキスト プレースホルダー 3">
             <a:extLst>
               <a:ext uri="{FF2B5EF4-FFF2-40B4-BE49-F238E27FC236}">
-                <a16:creationId xmlns:a16="http://schemas.microsoft.com/office/drawing/2014/main" id="{3CFA42F1-6BF0-B2F7-F24D-4520461B0615}"/>
+                <a16:creationId xmlns:a16="http://schemas.microsoft.com/office/drawing/2014/main" id="{AD69CE8D-C896-F56A-8E1D-B87B363B00DC}"/>
               </a:ext>
             </a:extLst>
           </p:cNvPr>
@@ -2618,7 +2618,7 @@
           <p:cNvPr id="5" name="日付プレースホルダー 4">
             <a:extLst>
               <a:ext uri="{FF2B5EF4-FFF2-40B4-BE49-F238E27FC236}">
-                <a16:creationId xmlns:a16="http://schemas.microsoft.com/office/drawing/2014/main" id="{1EF0CC23-1044-78C3-BD18-F22DCE6DDF7E}"/>
+                <a16:creationId xmlns:a16="http://schemas.microsoft.com/office/drawing/2014/main" id="{B1B6BCD5-D7B2-7846-F040-A3E8E01BD77D}"/>
               </a:ext>
             </a:extLst>
           </p:cNvPr>
@@ -2634,7 +2634,7 @@
           <a:bodyPr/>
           <a:lstStyle/>
           <a:p>
-            <a:fld id="{78BBC86E-792B-4DDA-9FCE-CC582720DB85}" type="datetimeFigureOut">
+            <a:fld id="{B083C545-12FB-4062-9B14-BF23A6062F68}" type="datetimeFigureOut">
               <a:rPr kumimoji="1" lang="ja-JP" altLang="en-US" smtClean="0"/>
               <a:t>2026/7/30</a:t>
             </a:fld>
@@ -2647,7 +2647,7 @@
           <p:cNvPr id="6" name="フッター プレースホルダー 5">
             <a:extLst>
               <a:ext uri="{FF2B5EF4-FFF2-40B4-BE49-F238E27FC236}">
-                <a16:creationId xmlns:a16="http://schemas.microsoft.com/office/drawing/2014/main" id="{817DD8D1-CB28-3AF6-3299-D3E797C3F8A6}"/>
+                <a16:creationId xmlns:a16="http://schemas.microsoft.com/office/drawing/2014/main" id="{3B1438AF-436E-D14D-3AB8-0D2A0527CC4B}"/>
               </a:ext>
             </a:extLst>
           </p:cNvPr>
@@ -2672,7 +2672,7 @@
           <p:cNvPr id="7" name="スライド番号プレースホルダー 6">
             <a:extLst>
               <a:ext uri="{FF2B5EF4-FFF2-40B4-BE49-F238E27FC236}">
-                <a16:creationId xmlns:a16="http://schemas.microsoft.com/office/drawing/2014/main" id="{5FC07BC5-79BA-6485-3E78-4DE2CC85DD42}"/>
+                <a16:creationId xmlns:a16="http://schemas.microsoft.com/office/drawing/2014/main" id="{A72CD2CE-4C01-6A0D-7774-577C81DA4B59}"/>
               </a:ext>
             </a:extLst>
           </p:cNvPr>
@@ -2688,7 +2688,7 @@
           <a:bodyPr/>
           <a:lstStyle/>
           <a:p>
-            <a:fld id="{4C91C4C9-2D7F-4D5D-9E39-574BF1859B2F}" type="slidenum">
+            <a:fld id="{38F0887C-0FF1-4E9F-A2C5-5279785D2C7C}" type="slidenum">
               <a:rPr kumimoji="1" lang="ja-JP" altLang="en-US" smtClean="0"/>
               <a:t>‹#›</a:t>
             </a:fld>
@@ -2699,7 +2699,7 @@
     </p:spTree>
     <p:extLst>
       <p:ext uri="{BB962C8B-B14F-4D97-AF65-F5344CB8AC3E}">
-        <p14:creationId xmlns:p14="http://schemas.microsoft.com/office/powerpoint/2010/main" val="1482364850"/>
+        <p14:creationId xmlns:p14="http://schemas.microsoft.com/office/powerpoint/2010/main" val="3297903283"/>
       </p:ext>
     </p:extLst>
   </p:cSld>
@@ -2731,7 +2731,7 @@
           <p:cNvPr id="2" name="タイトル 1">
             <a:extLst>
               <a:ext uri="{FF2B5EF4-FFF2-40B4-BE49-F238E27FC236}">
-                <a16:creationId xmlns:a16="http://schemas.microsoft.com/office/drawing/2014/main" id="{A750DD09-8287-ADA1-94B1-0BC852877E7B}"/>
+                <a16:creationId xmlns:a16="http://schemas.microsoft.com/office/drawing/2014/main" id="{EC429D71-87A2-F6EE-EEEC-6D6D66D12207}"/>
               </a:ext>
             </a:extLst>
           </p:cNvPr>
@@ -2768,7 +2768,7 @@
           <p:cNvPr id="3" name="図プレースホルダー 2">
             <a:extLst>
               <a:ext uri="{FF2B5EF4-FFF2-40B4-BE49-F238E27FC236}">
-                <a16:creationId xmlns:a16="http://schemas.microsoft.com/office/drawing/2014/main" id="{50817FDA-04E9-CD1B-8D63-C076BF435467}"/>
+                <a16:creationId xmlns:a16="http://schemas.microsoft.com/office/drawing/2014/main" id="{DF48F206-7E26-8EA4-4173-31AD8639274E}"/>
               </a:ext>
             </a:extLst>
           </p:cNvPr>
@@ -2835,7 +2835,7 @@
           <p:cNvPr id="4" name="テキスト プレースホルダー 3">
             <a:extLst>
               <a:ext uri="{FF2B5EF4-FFF2-40B4-BE49-F238E27FC236}">
-                <a16:creationId xmlns:a16="http://schemas.microsoft.com/office/drawing/2014/main" id="{11CEC244-6AD9-17BC-B991-044EED561ABD}"/>
+                <a16:creationId xmlns:a16="http://schemas.microsoft.com/office/drawing/2014/main" id="{180C2F97-97DB-3DF0-ECD3-B56525853730}"/>
               </a:ext>
             </a:extLst>
           </p:cNvPr>
@@ -2906,7 +2906,7 @@
           <p:cNvPr id="5" name="日付プレースホルダー 4">
             <a:extLst>
               <a:ext uri="{FF2B5EF4-FFF2-40B4-BE49-F238E27FC236}">
-                <a16:creationId xmlns:a16="http://schemas.microsoft.com/office/drawing/2014/main" id="{FC35C123-15F5-0224-2E4E-E5DD6DAE57DB}"/>
+                <a16:creationId xmlns:a16="http://schemas.microsoft.com/office/drawing/2014/main" id="{99F61638-FFEF-BCAF-0FE6-0290F609B529}"/>
               </a:ext>
             </a:extLst>
           </p:cNvPr>
@@ -2922,7 +2922,7 @@
           <a:bodyPr/>
           <a:lstStyle/>
           <a:p>
-            <a:fld id="{78BBC86E-792B-4DDA-9FCE-CC582720DB85}" type="datetimeFigureOut">
+            <a:fld id="{B083C545-12FB-4062-9B14-BF23A6062F68}" type="datetimeFigureOut">
               <a:rPr kumimoji="1" lang="ja-JP" altLang="en-US" smtClean="0"/>
               <a:t>2026/7/30</a:t>
             </a:fld>
@@ -2935,7 +2935,7 @@
           <p:cNvPr id="6" name="フッター プレースホルダー 5">
             <a:extLst>
               <a:ext uri="{FF2B5EF4-FFF2-40B4-BE49-F238E27FC236}">
-                <a16:creationId xmlns:a16="http://schemas.microsoft.com/office/drawing/2014/main" id="{9BAE0CB5-BFC5-D649-072D-C9C6453ACE9F}"/>
+                <a16:creationId xmlns:a16="http://schemas.microsoft.com/office/drawing/2014/main" id="{4CB0B071-32C8-0D31-1C2A-7162A7F24B9A}"/>
               </a:ext>
             </a:extLst>
           </p:cNvPr>
@@ -2960,7 +2960,7 @@
           <p:cNvPr id="7" name="スライド番号プレースホルダー 6">
             <a:extLst>
               <a:ext uri="{FF2B5EF4-FFF2-40B4-BE49-F238E27FC236}">
-                <a16:creationId xmlns:a16="http://schemas.microsoft.com/office/drawing/2014/main" id="{9B893415-7FD8-3CD9-5DF7-9E2F4616C65B}"/>
+                <a16:creationId xmlns:a16="http://schemas.microsoft.com/office/drawing/2014/main" id="{D893F8BC-494C-A3AE-9CA2-CEC10FE4C27E}"/>
               </a:ext>
             </a:extLst>
           </p:cNvPr>
@@ -2976,7 +2976,7 @@
           <a:bodyPr/>
           <a:lstStyle/>
           <a:p>
-            <a:fld id="{4C91C4C9-2D7F-4D5D-9E39-574BF1859B2F}" type="slidenum">
+            <a:fld id="{38F0887C-0FF1-4E9F-A2C5-5279785D2C7C}" type="slidenum">
               <a:rPr kumimoji="1" lang="ja-JP" altLang="en-US" smtClean="0"/>
               <a:t>‹#›</a:t>
             </a:fld>
@@ -2987,7 +2987,7 @@
     </p:spTree>
     <p:extLst>
       <p:ext uri="{BB962C8B-B14F-4D97-AF65-F5344CB8AC3E}">
-        <p14:creationId xmlns:p14="http://schemas.microsoft.com/office/powerpoint/2010/main" val="3753318552"/>
+        <p14:creationId xmlns:p14="http://schemas.microsoft.com/office/powerpoint/2010/main" val="3391416875"/>
       </p:ext>
     </p:extLst>
   </p:cSld>
@@ -3024,7 +3024,7 @@
           <p:cNvPr id="2" name="タイトル プレースホルダー 1">
             <a:extLst>
               <a:ext uri="{FF2B5EF4-FFF2-40B4-BE49-F238E27FC236}">
-                <a16:creationId xmlns:a16="http://schemas.microsoft.com/office/drawing/2014/main" id="{2447070B-EDB2-1281-E07E-C2E4AC5274A4}"/>
+                <a16:creationId xmlns:a16="http://schemas.microsoft.com/office/drawing/2014/main" id="{851664CF-6BBD-B0ED-3EEC-BED876AE2DC9}"/>
               </a:ext>
             </a:extLst>
           </p:cNvPr>
@@ -3062,7 +3062,7 @@
           <p:cNvPr id="3" name="テキスト プレースホルダー 2">
             <a:extLst>
               <a:ext uri="{FF2B5EF4-FFF2-40B4-BE49-F238E27FC236}">
-                <a16:creationId xmlns:a16="http://schemas.microsoft.com/office/drawing/2014/main" id="{500AE674-D644-FFE6-0087-AF477FF60672}"/>
+                <a16:creationId xmlns:a16="http://schemas.microsoft.com/office/drawing/2014/main" id="{A7048156-7F6A-12DF-B585-E30351730ED1}"/>
               </a:ext>
             </a:extLst>
           </p:cNvPr>
@@ -3161,7 +3161,7 @@
           <p:cNvPr id="4" name="日付プレースホルダー 3">
             <a:extLst>
               <a:ext uri="{FF2B5EF4-FFF2-40B4-BE49-F238E27FC236}">
-                <a16:creationId xmlns:a16="http://schemas.microsoft.com/office/drawing/2014/main" id="{152A4EEC-A75F-2A67-1CEB-EDD3EF527353}"/>
+                <a16:creationId xmlns:a16="http://schemas.microsoft.com/office/drawing/2014/main" id="{E90A56AA-C920-B876-8193-EBB01D307C53}"/>
               </a:ext>
             </a:extLst>
           </p:cNvPr>
@@ -3195,7 +3195,7 @@
             </a:lvl1pPr>
           </a:lstStyle>
           <a:p>
-            <a:fld id="{78BBC86E-792B-4DDA-9FCE-CC582720DB85}" type="datetimeFigureOut">
+            <a:fld id="{B083C545-12FB-4062-9B14-BF23A6062F68}" type="datetimeFigureOut">
               <a:rPr kumimoji="1" lang="ja-JP" altLang="en-US" smtClean="0"/>
               <a:t>2026/7/30</a:t>
             </a:fld>
@@ -3208,7 +3208,7 @@
           <p:cNvPr id="5" name="フッター プレースホルダー 4">
             <a:extLst>
               <a:ext uri="{FF2B5EF4-FFF2-40B4-BE49-F238E27FC236}">
-                <a16:creationId xmlns:a16="http://schemas.microsoft.com/office/drawing/2014/main" id="{7374D93A-999F-1D40-647F-558AB90EC2DC}"/>
+                <a16:creationId xmlns:a16="http://schemas.microsoft.com/office/drawing/2014/main" id="{F57EAF09-31E6-487B-31BB-01413740E65C}"/>
               </a:ext>
             </a:extLst>
           </p:cNvPr>
@@ -3251,7 +3251,7 @@
           <p:cNvPr id="6" name="スライド番号プレースホルダー 5">
             <a:extLst>
               <a:ext uri="{FF2B5EF4-FFF2-40B4-BE49-F238E27FC236}">
-                <a16:creationId xmlns:a16="http://schemas.microsoft.com/office/drawing/2014/main" id="{64B255E6-82FC-2E36-715A-EF9C6058CF6F}"/>
+                <a16:creationId xmlns:a16="http://schemas.microsoft.com/office/drawing/2014/main" id="{3508D8FA-B6F3-F575-ADCC-6FFE761AE835}"/>
               </a:ext>
             </a:extLst>
           </p:cNvPr>
@@ -3285,7 +3285,7 @@
             </a:lvl1pPr>
           </a:lstStyle>
           <a:p>
-            <a:fld id="{4C91C4C9-2D7F-4D5D-9E39-574BF1859B2F}" type="slidenum">
+            <a:fld id="{38F0887C-0FF1-4E9F-A2C5-5279785D2C7C}" type="slidenum">
               <a:rPr kumimoji="1" lang="ja-JP" altLang="en-US" smtClean="0"/>
               <a:t>‹#›</a:t>
             </a:fld>
@@ -3296,7 +3296,7 @@
     </p:spTree>
     <p:extLst>
       <p:ext uri="{BB962C8B-B14F-4D97-AF65-F5344CB8AC3E}">
-        <p14:creationId xmlns:p14="http://schemas.microsoft.com/office/powerpoint/2010/main" val="3765041046"/>
+        <p14:creationId xmlns:p14="http://schemas.microsoft.com/office/powerpoint/2010/main" val="3071827601"/>
       </p:ext>
     </p:extLst>
   </p:cSld>
@@ -3619,7 +3619,7 @@
           <p:cNvPr id="2" name="テキスト ボックス 1">
             <a:extLst>
               <a:ext uri="{FF2B5EF4-FFF2-40B4-BE49-F238E27FC236}">
-                <a16:creationId xmlns:a16="http://schemas.microsoft.com/office/drawing/2014/main" id="{2022DDF4-9060-736D-1CCD-33B1E0653471}"/>
+                <a16:creationId xmlns:a16="http://schemas.microsoft.com/office/drawing/2014/main" id="{BADD700A-2BF4-D162-0872-9701AAFB9908}"/>
               </a:ext>
             </a:extLst>
           </p:cNvPr>
@@ -3665,7 +3665,7 @@
           <p:cNvPr id="3" name="テキスト ボックス 2">
             <a:extLst>
               <a:ext uri="{FF2B5EF4-FFF2-40B4-BE49-F238E27FC236}">
-                <a16:creationId xmlns:a16="http://schemas.microsoft.com/office/drawing/2014/main" id="{EA24F016-F090-19A0-CFB7-DBFDD014AC01}"/>
+                <a16:creationId xmlns:a16="http://schemas.microsoft.com/office/drawing/2014/main" id="{CC8F938D-3606-10A4-28F6-83270400088B}"/>
               </a:ext>
             </a:extLst>
           </p:cNvPr>
@@ -3714,7 +3714,7 @@
           <p:cNvPr id="4" name="テキスト ボックス 3">
             <a:extLst>
               <a:ext uri="{FF2B5EF4-FFF2-40B4-BE49-F238E27FC236}">
-                <a16:creationId xmlns:a16="http://schemas.microsoft.com/office/drawing/2014/main" id="{E577CB9A-A554-43F4-8F17-17D1F3144F1C}"/>
+                <a16:creationId xmlns:a16="http://schemas.microsoft.com/office/drawing/2014/main" id="{77EEFF70-9361-699A-2764-D0E92C86D777}"/>
               </a:ext>
             </a:extLst>
           </p:cNvPr>
@@ -3754,7 +3754,7 @@
           <p:cNvPr id="5" name="テキスト ボックス 4">
             <a:extLst>
               <a:ext uri="{FF2B5EF4-FFF2-40B4-BE49-F238E27FC236}">
-                <a16:creationId xmlns:a16="http://schemas.microsoft.com/office/drawing/2014/main" id="{D25D059C-A4CD-EC31-F7C2-5BD253443952}"/>
+                <a16:creationId xmlns:a16="http://schemas.microsoft.com/office/drawing/2014/main" id="{64F6EEAF-93AF-FB02-E961-7327A0FBC4DA}"/>
               </a:ext>
             </a:extLst>
           </p:cNvPr>
@@ -3801,7 +3801,7 @@
             <a:hlinkClick r:id="" action="ppaction://media"/>
             <a:extLst>
               <a:ext uri="{FF2B5EF4-FFF2-40B4-BE49-F238E27FC236}">
-                <a16:creationId xmlns:a16="http://schemas.microsoft.com/office/drawing/2014/main" id="{76F5C445-CF05-354E-1EFA-9A9A8756996B}"/>
+                <a16:creationId xmlns:a16="http://schemas.microsoft.com/office/drawing/2014/main" id="{F02B4767-F5FD-EC70-DB4B-8BC3A2F71E31}"/>
               </a:ext>
             </a:extLst>
           </p:cNvPr>
@@ -3836,7 +3836,7 @@
     </p:spTree>
     <p:extLst>
       <p:ext uri="{BB962C8B-B14F-4D97-AF65-F5344CB8AC3E}">
-        <p14:creationId xmlns:p14="http://schemas.microsoft.com/office/powerpoint/2010/main" val="3577096402"/>
+        <p14:creationId xmlns:p14="http://schemas.microsoft.com/office/powerpoint/2010/main" val="2737531202"/>
       </p:ext>
     </p:extLst>
   </p:cSld>
@@ -3960,7 +3960,7 @@
           <p:cNvPr id="2" name="テキスト ボックス 1">
             <a:extLst>
               <a:ext uri="{FF2B5EF4-FFF2-40B4-BE49-F238E27FC236}">
-                <a16:creationId xmlns:a16="http://schemas.microsoft.com/office/drawing/2014/main" id="{DC73D165-5986-E8A6-B4B0-750A2C9E8D1D}"/>
+                <a16:creationId xmlns:a16="http://schemas.microsoft.com/office/drawing/2014/main" id="{6C387084-5260-7466-7D5A-8B19522323AD}"/>
               </a:ext>
             </a:extLst>
           </p:cNvPr>
@@ -4006,7 +4006,7 @@
           <p:cNvPr id="3" name="テキスト ボックス 2">
             <a:extLst>
               <a:ext uri="{FF2B5EF4-FFF2-40B4-BE49-F238E27FC236}">
-                <a16:creationId xmlns:a16="http://schemas.microsoft.com/office/drawing/2014/main" id="{AE526F81-8D3C-BC80-7DF1-C06BA5C65B8B}"/>
+                <a16:creationId xmlns:a16="http://schemas.microsoft.com/office/drawing/2014/main" id="{AD7040D6-01D9-BC2A-C6D7-111197A52B8E}"/>
               </a:ext>
             </a:extLst>
           </p:cNvPr>
@@ -4046,7 +4046,7 @@
           <p:cNvPr id="4" name="テキスト ボックス 3">
             <a:extLst>
               <a:ext uri="{FF2B5EF4-FFF2-40B4-BE49-F238E27FC236}">
-                <a16:creationId xmlns:a16="http://schemas.microsoft.com/office/drawing/2014/main" id="{08E3749C-0E7B-A0AF-2421-2C22B83FCE65}"/>
+                <a16:creationId xmlns:a16="http://schemas.microsoft.com/office/drawing/2014/main" id="{C9DA4384-579F-AD43-33B6-5EEFA536E0BA}"/>
               </a:ext>
             </a:extLst>
           </p:cNvPr>
@@ -4095,7 +4095,7 @@
           <p:cNvPr id="5" name="テキスト ボックス 4">
             <a:extLst>
               <a:ext uri="{FF2B5EF4-FFF2-40B4-BE49-F238E27FC236}">
-                <a16:creationId xmlns:a16="http://schemas.microsoft.com/office/drawing/2014/main" id="{D75BA93E-349E-4DA9-E23F-C8F9E78F033C}"/>
+                <a16:creationId xmlns:a16="http://schemas.microsoft.com/office/drawing/2014/main" id="{6C370D32-6865-4F76-48C2-8DA6CFDDE139}"/>
               </a:ext>
             </a:extLst>
           </p:cNvPr>
@@ -4142,7 +4142,7 @@
             <a:hlinkClick r:id="" action="ppaction://media"/>
             <a:extLst>
               <a:ext uri="{FF2B5EF4-FFF2-40B4-BE49-F238E27FC236}">
-                <a16:creationId xmlns:a16="http://schemas.microsoft.com/office/drawing/2014/main" id="{4E63AFE2-2F2D-AD77-A6F2-78D74DD36812}"/>
+                <a16:creationId xmlns:a16="http://schemas.microsoft.com/office/drawing/2014/main" id="{BFBC843B-094A-342A-9279-E989E9626562}"/>
               </a:ext>
             </a:extLst>
           </p:cNvPr>
@@ -4177,7 +4177,7 @@
     </p:spTree>
     <p:extLst>
       <p:ext uri="{BB962C8B-B14F-4D97-AF65-F5344CB8AC3E}">
-        <p14:creationId xmlns:p14="http://schemas.microsoft.com/office/powerpoint/2010/main" val="2575899449"/>
+        <p14:creationId xmlns:p14="http://schemas.microsoft.com/office/powerpoint/2010/main" val="3937859390"/>
       </p:ext>
     </p:extLst>
   </p:cSld>
@@ -4301,7 +4301,7 @@
           <p:cNvPr id="2" name="テキスト ボックス 1">
             <a:extLst>
               <a:ext uri="{FF2B5EF4-FFF2-40B4-BE49-F238E27FC236}">
-                <a16:creationId xmlns:a16="http://schemas.microsoft.com/office/drawing/2014/main" id="{A80BFC35-175C-FC78-C692-F900DE9D5370}"/>
+                <a16:creationId xmlns:a16="http://schemas.microsoft.com/office/drawing/2014/main" id="{6544EB75-80E3-5FFC-2F36-635BE9EC5ED7}"/>
               </a:ext>
             </a:extLst>
           </p:cNvPr>
@@ -4347,7 +4347,7 @@
           <p:cNvPr id="3" name="テキスト ボックス 2">
             <a:extLst>
               <a:ext uri="{FF2B5EF4-FFF2-40B4-BE49-F238E27FC236}">
-                <a16:creationId xmlns:a16="http://schemas.microsoft.com/office/drawing/2014/main" id="{074F5BEA-89F5-E961-AD44-46B2496A3449}"/>
+                <a16:creationId xmlns:a16="http://schemas.microsoft.com/office/drawing/2014/main" id="{085F28DC-3182-92BF-3519-A5E3CA4BFC09}"/>
               </a:ext>
             </a:extLst>
           </p:cNvPr>
@@ -4387,7 +4387,7 @@
           <p:cNvPr id="4" name="テキスト ボックス 3">
             <a:extLst>
               <a:ext uri="{FF2B5EF4-FFF2-40B4-BE49-F238E27FC236}">
-                <a16:creationId xmlns:a16="http://schemas.microsoft.com/office/drawing/2014/main" id="{B3800A3E-4BC5-D3D7-6FED-306B44E8BF3C}"/>
+                <a16:creationId xmlns:a16="http://schemas.microsoft.com/office/drawing/2014/main" id="{F8CE1509-AC5F-8E56-A2CB-4408698AE0A1}"/>
               </a:ext>
             </a:extLst>
           </p:cNvPr>
@@ -4500,7 +4500,7 @@
           <p:cNvPr id="5" name="テキスト ボックス 4">
             <a:extLst>
               <a:ext uri="{FF2B5EF4-FFF2-40B4-BE49-F238E27FC236}">
-                <a16:creationId xmlns:a16="http://schemas.microsoft.com/office/drawing/2014/main" id="{D876D6C7-028A-4E14-CA14-D6E19DF3DCA5}"/>
+                <a16:creationId xmlns:a16="http://schemas.microsoft.com/office/drawing/2014/main" id="{86540112-C198-A698-DF7C-AC6A24C7EFCE}"/>
               </a:ext>
             </a:extLst>
           </p:cNvPr>
@@ -4547,7 +4547,7 @@
             <a:hlinkClick r:id="" action="ppaction://media"/>
             <a:extLst>
               <a:ext uri="{FF2B5EF4-FFF2-40B4-BE49-F238E27FC236}">
-                <a16:creationId xmlns:a16="http://schemas.microsoft.com/office/drawing/2014/main" id="{E70B9C99-2401-F08C-6820-4362DB79A956}"/>
+                <a16:creationId xmlns:a16="http://schemas.microsoft.com/office/drawing/2014/main" id="{64AAF42A-96FD-59CC-24CA-A842C5E5E652}"/>
               </a:ext>
             </a:extLst>
           </p:cNvPr>
@@ -4582,7 +4582,7 @@
     </p:spTree>
     <p:extLst>
       <p:ext uri="{BB962C8B-B14F-4D97-AF65-F5344CB8AC3E}">
-        <p14:creationId xmlns:p14="http://schemas.microsoft.com/office/powerpoint/2010/main" val="860723955"/>
+        <p14:creationId xmlns:p14="http://schemas.microsoft.com/office/powerpoint/2010/main" val="3273840993"/>
       </p:ext>
     </p:extLst>
   </p:cSld>
@@ -4706,7 +4706,7 @@
           <p:cNvPr id="2" name="テキスト ボックス 1">
             <a:extLst>
               <a:ext uri="{FF2B5EF4-FFF2-40B4-BE49-F238E27FC236}">
-                <a16:creationId xmlns:a16="http://schemas.microsoft.com/office/drawing/2014/main" id="{09B95CC1-A290-523C-725C-DC6AFA68F465}"/>
+                <a16:creationId xmlns:a16="http://schemas.microsoft.com/office/drawing/2014/main" id="{A31B6A39-7567-0769-E48F-FF42BFDF1112}"/>
               </a:ext>
             </a:extLst>
           </p:cNvPr>
@@ -4752,7 +4752,7 @@
           <p:cNvPr id="3" name="テキスト ボックス 2">
             <a:extLst>
               <a:ext uri="{FF2B5EF4-FFF2-40B4-BE49-F238E27FC236}">
-                <a16:creationId xmlns:a16="http://schemas.microsoft.com/office/drawing/2014/main" id="{AF0827F0-3EE7-ACB0-96B4-281ACDE72FF0}"/>
+                <a16:creationId xmlns:a16="http://schemas.microsoft.com/office/drawing/2014/main" id="{64637F05-DF17-E77A-2679-DAAC67D1FD1D}"/>
               </a:ext>
             </a:extLst>
           </p:cNvPr>
@@ -4792,7 +4792,7 @@
           <p:cNvPr id="4" name="テキスト ボックス 3">
             <a:extLst>
               <a:ext uri="{FF2B5EF4-FFF2-40B4-BE49-F238E27FC236}">
-                <a16:creationId xmlns:a16="http://schemas.microsoft.com/office/drawing/2014/main" id="{B1494EAA-D0FC-B712-5610-437BBDA4A41C}"/>
+                <a16:creationId xmlns:a16="http://schemas.microsoft.com/office/drawing/2014/main" id="{15177211-4CC8-9620-AD39-43D242B0C85E}"/>
               </a:ext>
             </a:extLst>
           </p:cNvPr>
@@ -4902,7 +4902,7 @@
           <p:cNvPr id="5" name="テキスト ボックス 4">
             <a:extLst>
               <a:ext uri="{FF2B5EF4-FFF2-40B4-BE49-F238E27FC236}">
-                <a16:creationId xmlns:a16="http://schemas.microsoft.com/office/drawing/2014/main" id="{5ED70ABA-D1B6-A7A3-B37C-E43DA3C81F7F}"/>
+                <a16:creationId xmlns:a16="http://schemas.microsoft.com/office/drawing/2014/main" id="{4EAB6E0E-461F-1910-C1F9-FCF24A6ECD43}"/>
               </a:ext>
             </a:extLst>
           </p:cNvPr>
@@ -4949,7 +4949,7 @@
             <a:hlinkClick r:id="" action="ppaction://media"/>
             <a:extLst>
               <a:ext uri="{FF2B5EF4-FFF2-40B4-BE49-F238E27FC236}">
-                <a16:creationId xmlns:a16="http://schemas.microsoft.com/office/drawing/2014/main" id="{2A204B7E-DB0B-5CB4-C3DC-ED36FA621159}"/>
+                <a16:creationId xmlns:a16="http://schemas.microsoft.com/office/drawing/2014/main" id="{21E9B175-C326-E06F-20BB-B4BA91C6AF63}"/>
               </a:ext>
             </a:extLst>
           </p:cNvPr>
@@ -4984,7 +4984,7 @@
     </p:spTree>
     <p:extLst>
       <p:ext uri="{BB962C8B-B14F-4D97-AF65-F5344CB8AC3E}">
-        <p14:creationId xmlns:p14="http://schemas.microsoft.com/office/powerpoint/2010/main" val="233416673"/>
+        <p14:creationId xmlns:p14="http://schemas.microsoft.com/office/powerpoint/2010/main" val="991930057"/>
       </p:ext>
     </p:extLst>
   </p:cSld>
@@ -5108,7 +5108,7 @@
           <p:cNvPr id="2" name="テキスト ボックス 1">
             <a:extLst>
               <a:ext uri="{FF2B5EF4-FFF2-40B4-BE49-F238E27FC236}">
-                <a16:creationId xmlns:a16="http://schemas.microsoft.com/office/drawing/2014/main" id="{904D88E0-F367-B8A7-D03F-7AD916FBE00C}"/>
+                <a16:creationId xmlns:a16="http://schemas.microsoft.com/office/drawing/2014/main" id="{6D01B97F-A79A-A9E9-00AB-3CD5EB7FAF0F}"/>
               </a:ext>
             </a:extLst>
           </p:cNvPr>
@@ -5154,7 +5154,7 @@
           <p:cNvPr id="3" name="テキスト ボックス 2">
             <a:extLst>
               <a:ext uri="{FF2B5EF4-FFF2-40B4-BE49-F238E27FC236}">
-                <a16:creationId xmlns:a16="http://schemas.microsoft.com/office/drawing/2014/main" id="{CF6ACC92-3DDD-2960-4E23-6ACB3DD47A3F}"/>
+                <a16:creationId xmlns:a16="http://schemas.microsoft.com/office/drawing/2014/main" id="{8164D44E-1B00-48AD-943D-7EFDDCCB36CF}"/>
               </a:ext>
             </a:extLst>
           </p:cNvPr>
@@ -5194,7 +5194,7 @@
           <p:cNvPr id="4" name="テキスト ボックス 3">
             <a:extLst>
               <a:ext uri="{FF2B5EF4-FFF2-40B4-BE49-F238E27FC236}">
-                <a16:creationId xmlns:a16="http://schemas.microsoft.com/office/drawing/2014/main" id="{AFB72938-33FF-72B1-9531-FDFAF0101C2B}"/>
+                <a16:creationId xmlns:a16="http://schemas.microsoft.com/office/drawing/2014/main" id="{64218DD0-F014-5E31-F544-47B01DDF4299}"/>
               </a:ext>
             </a:extLst>
           </p:cNvPr>
@@ -5218,20 +5218,14 @@
           <a:lstStyle/>
           <a:p>
             <a:r>
-              <a:rPr kumimoji="1" lang="en-US" altLang="ja-JP" sz="2000">
+              <a:rPr kumimoji="1" lang="ja-JP" altLang="en-US" sz="2000">
                 <a:solidFill>
                   <a:srgbClr val="333333"/>
                 </a:solidFill>
                 <a:latin typeface="Arial" panose="020B0604020202020204" pitchFamily="34" charset="0"/>
               </a:rPr>
-              <a:t>Configure GitHub Pages for sugusuu.jp</a:t>
-            </a:r>
-            <a:endParaRPr kumimoji="1" lang="ja-JP" altLang="en-US" sz="2000">
-              <a:solidFill>
-                <a:srgbClr val="333333"/>
-              </a:solidFill>
-              <a:latin typeface="Arial" panose="020B0604020202020204" pitchFamily="34" charset="0"/>
-            </a:endParaRPr>
+              <a:t>直近のコミットでは、実装の見直しと継続的な改善が行われました。</a:t>
+            </a:r>
           </a:p>
         </p:txBody>
       </p:sp>
@@ -5240,7 +5234,7 @@
           <p:cNvPr id="5" name="テキスト ボックス 4">
             <a:extLst>
               <a:ext uri="{FF2B5EF4-FFF2-40B4-BE49-F238E27FC236}">
-                <a16:creationId xmlns:a16="http://schemas.microsoft.com/office/drawing/2014/main" id="{22B187EE-98C1-ACE0-3B46-BED4A264C445}"/>
+                <a16:creationId xmlns:a16="http://schemas.microsoft.com/office/drawing/2014/main" id="{E202B945-5DDF-69BD-0108-2AD0F4ECCC0C}"/>
               </a:ext>
             </a:extLst>
           </p:cNvPr>
@@ -5287,7 +5281,7 @@
             <a:hlinkClick r:id="" action="ppaction://media"/>
             <a:extLst>
               <a:ext uri="{FF2B5EF4-FFF2-40B4-BE49-F238E27FC236}">
-                <a16:creationId xmlns:a16="http://schemas.microsoft.com/office/drawing/2014/main" id="{44BF7DD4-5DDB-8F50-3B6F-D8E53F45FC8D}"/>
+                <a16:creationId xmlns:a16="http://schemas.microsoft.com/office/drawing/2014/main" id="{B1CA4D53-3234-964D-CFF2-D88839D98653}"/>
               </a:ext>
             </a:extLst>
           </p:cNvPr>
@@ -5322,7 +5316,7 @@
     </p:spTree>
     <p:extLst>
       <p:ext uri="{BB962C8B-B14F-4D97-AF65-F5344CB8AC3E}">
-        <p14:creationId xmlns:p14="http://schemas.microsoft.com/office/powerpoint/2010/main" val="2257129776"/>
+        <p14:creationId xmlns:p14="http://schemas.microsoft.com/office/powerpoint/2010/main" val="1401555292"/>
       </p:ext>
     </p:extLst>
   </p:cSld>
@@ -5331,10 +5325,10 @@
   </p:clrMapOvr>
   <mc:AlternateContent xmlns:mc="http://schemas.openxmlformats.org/markup-compatibility/2006">
     <mc:Choice xmlns:p14="http://schemas.microsoft.com/office/powerpoint/2010/main" Requires="p14">
-      <p:transition spd="slow" p14:dur="2000" advTm="8000"/>
+      <p:transition spd="slow" p14:dur="2000" advTm="7000"/>
     </mc:Choice>
     <mc:Fallback>
-      <p:transition spd="slow" advTm="8000"/>
+      <p:transition spd="slow" advTm="7000"/>
     </mc:Fallback>
   </mc:AlternateContent>
   <p:timing>
@@ -5365,7 +5359,7 @@
                                   <p:childTnLst>
                                     <p:cmd type="call" cmd="playFrom(0.0)">
                                       <p:cBhvr>
-                                        <p:cTn id="6" dur="7426" fill="hold"/>
+                                        <p:cTn id="6" dur="6076" fill="hold"/>
                                         <p:tgtEl>
                                           <p:spTgt spid="6"/>
                                         </p:tgtEl>
@@ -5446,7 +5440,7 @@
           <p:cNvPr id="2" name="テキスト ボックス 1">
             <a:extLst>
               <a:ext uri="{FF2B5EF4-FFF2-40B4-BE49-F238E27FC236}">
-                <a16:creationId xmlns:a16="http://schemas.microsoft.com/office/drawing/2014/main" id="{3743E70C-887A-2408-0069-19A9CE3579B6}"/>
+                <a16:creationId xmlns:a16="http://schemas.microsoft.com/office/drawing/2014/main" id="{3915A871-B1D2-FD92-928B-6FD3B54859F8}"/>
               </a:ext>
             </a:extLst>
           </p:cNvPr>
@@ -5492,7 +5486,7 @@
           <p:cNvPr id="3" name="テキスト ボックス 2">
             <a:extLst>
               <a:ext uri="{FF2B5EF4-FFF2-40B4-BE49-F238E27FC236}">
-                <a16:creationId xmlns:a16="http://schemas.microsoft.com/office/drawing/2014/main" id="{DF991667-8548-5362-E008-1A760C7E2CC7}"/>
+                <a16:creationId xmlns:a16="http://schemas.microsoft.com/office/drawing/2014/main" id="{483DE0FF-A2E9-82F1-F1B4-776154C29F30}"/>
               </a:ext>
             </a:extLst>
           </p:cNvPr>
@@ -5532,7 +5526,7 @@
           <p:cNvPr id="4" name="テキスト ボックス 3">
             <a:extLst>
               <a:ext uri="{FF2B5EF4-FFF2-40B4-BE49-F238E27FC236}">
-                <a16:creationId xmlns:a16="http://schemas.microsoft.com/office/drawing/2014/main" id="{C3B42BC0-C875-A49A-E3D1-44A1CF9EC361}"/>
+                <a16:creationId xmlns:a16="http://schemas.microsoft.com/office/drawing/2014/main" id="{31F9D04F-4B87-9434-CA6B-51C1FFD071C0}"/>
               </a:ext>
             </a:extLst>
           </p:cNvPr>
@@ -5597,7 +5591,7 @@
           <p:cNvPr id="5" name="テキスト ボックス 4">
             <a:extLst>
               <a:ext uri="{FF2B5EF4-FFF2-40B4-BE49-F238E27FC236}">
-                <a16:creationId xmlns:a16="http://schemas.microsoft.com/office/drawing/2014/main" id="{88C1863B-B075-74D3-7A0B-570E84AA8503}"/>
+                <a16:creationId xmlns:a16="http://schemas.microsoft.com/office/drawing/2014/main" id="{7180EDD2-563E-1032-36D0-8BC8437C375A}"/>
               </a:ext>
             </a:extLst>
           </p:cNvPr>
@@ -5644,7 +5638,7 @@
             <a:hlinkClick r:id="" action="ppaction://media"/>
             <a:extLst>
               <a:ext uri="{FF2B5EF4-FFF2-40B4-BE49-F238E27FC236}">
-                <a16:creationId xmlns:a16="http://schemas.microsoft.com/office/drawing/2014/main" id="{039E3245-6F8C-838D-921E-C836529F9039}"/>
+                <a16:creationId xmlns:a16="http://schemas.microsoft.com/office/drawing/2014/main" id="{CAED8901-015E-9CAB-84A2-3CB8E9E9EEB6}"/>
               </a:ext>
             </a:extLst>
           </p:cNvPr>
@@ -5679,7 +5673,7 @@
     </p:spTree>
     <p:extLst>
       <p:ext uri="{BB962C8B-B14F-4D97-AF65-F5344CB8AC3E}">
-        <p14:creationId xmlns:p14="http://schemas.microsoft.com/office/powerpoint/2010/main" val="1531223270"/>
+        <p14:creationId xmlns:p14="http://schemas.microsoft.com/office/powerpoint/2010/main" val="1277717150"/>
       </p:ext>
     </p:extLst>
   </p:cSld>
